--- a/information-source-decks/05-thresholding-with-hopper.pptx
+++ b/information-source-decks/05-thresholding-with-hopper.pptx
@@ -2,19 +2,19 @@
 <file path=ppt/presentation.xml><?xml version="1.0" encoding="utf-8"?>
 <p:presentation xmlns:p="http://schemas.openxmlformats.org/presentationml/2006/main">
   <p:sldMasterIdLst>
-    <p:sldMasterId xmlns:r="http://schemas.openxmlformats.org/officeDocument/2006/relationships" id="2147483648" r:id="R6f687d91abdb48e1"/>
+    <p:sldMasterId xmlns:r="http://schemas.openxmlformats.org/officeDocument/2006/relationships" id="2147483648" r:id="R7be44e1fd5414b28"/>
   </p:sldMasterIdLst>
   <p:notesMasterIdLst>
-    <p:notesMasterId xmlns:r="http://schemas.openxmlformats.org/officeDocument/2006/relationships" r:id="R97b0011ff1c24195"/>
+    <p:notesMasterId xmlns:r="http://schemas.openxmlformats.org/officeDocument/2006/relationships" r:id="Re6cccb0b31a74d2d"/>
   </p:notesMasterIdLst>
   <p:sldIdLst>
-    <p:sldId xmlns:r="http://schemas.openxmlformats.org/officeDocument/2006/relationships" id="256" r:id="Rcb98233be11a4d01"/>
-    <p:sldId xmlns:r="http://schemas.openxmlformats.org/officeDocument/2006/relationships" id="257" r:id="Ra01bcaed8e584373"/>
-    <p:sldId xmlns:r="http://schemas.openxmlformats.org/officeDocument/2006/relationships" id="258" r:id="R6d8263dca3454701"/>
-    <p:sldId xmlns:r="http://schemas.openxmlformats.org/officeDocument/2006/relationships" id="259" r:id="Rebf79241a6984f7a"/>
-    <p:sldId xmlns:r="http://schemas.openxmlformats.org/officeDocument/2006/relationships" id="260" r:id="Rcfe013ba091240a3"/>
-    <p:sldId xmlns:r="http://schemas.openxmlformats.org/officeDocument/2006/relationships" id="261" r:id="Rc98092a0c4fa4066"/>
-    <p:sldId xmlns:r="http://schemas.openxmlformats.org/officeDocument/2006/relationships" id="262" r:id="Ra41fde278f584cf4"/>
+    <p:sldId xmlns:r="http://schemas.openxmlformats.org/officeDocument/2006/relationships" id="256" r:id="Rcc8d8fb3ee124f89"/>
+    <p:sldId xmlns:r="http://schemas.openxmlformats.org/officeDocument/2006/relationships" id="257" r:id="R051ff3933ec04c1d"/>
+    <p:sldId xmlns:r="http://schemas.openxmlformats.org/officeDocument/2006/relationships" id="258" r:id="Rb8548ebf143a48d7"/>
+    <p:sldId xmlns:r="http://schemas.openxmlformats.org/officeDocument/2006/relationships" id="259" r:id="R0880535c7eae4dd6"/>
+    <p:sldId xmlns:r="http://schemas.openxmlformats.org/officeDocument/2006/relationships" id="260" r:id="R0df33b054ba94887"/>
+    <p:sldId xmlns:r="http://schemas.openxmlformats.org/officeDocument/2006/relationships" id="261" r:id="R083084dd3f2747fa"/>
+    <p:sldId xmlns:r="http://schemas.openxmlformats.org/officeDocument/2006/relationships" id="262" r:id="Rd3af5c56fb164eb5"/>
   </p:sldIdLst>
   <p:sldSz cx="12192000" cy="6858000"/>
   <p:notesSz cx="6858000" cy="9144000"/>
@@ -448,7 +448,7 @@
           <a:lstStyle xmlns:a="http://schemas.openxmlformats.org/drawingml/2006/main"/>
           <a:p xmlns:a="http://schemas.openxmlformats.org/drawingml/2006/main">
             <a:r>
-              <a:t>Thresholding lesson cover.</a:t>
+              <a:t>Introduce thresholding as a deterministic image rule, not a learned model. The authentic camera hardware anchors the image-processing lesson in the actual aircraft.</a:t>
             </a:r>
           </a:p>
           <a:p xmlns:a="http://schemas.openxmlformats.org/drawingml/2006/main">
@@ -463,7 +463,12 @@
           </a:p>
           <a:p xmlns:a="http://schemas.openxmlformats.org/drawingml/2006/main">
             <a:r>
-              <a:t>- Hopper Studio project source and locally generated lesson materials.</a:t>
+              <a:t>- User-supplied high-resolution photograph: drone_photos/IMG_4476.jpeg</a:t>
+            </a:r>
+          </a:p>
+          <a:p xmlns:a="http://schemas.openxmlformats.org/drawingml/2006/main">
+            <a:r>
+              <a:t>- Hopper Studio threshold implementation: local_site/lib/vision.ts.</a:t>
             </a:r>
           </a:p>
           <a:p xmlns:a="http://schemas.openxmlformats.org/drawingml/2006/main">
@@ -903,7 +908,7 @@
           <a:lstStyle xmlns:a="http://schemas.openxmlformats.org/drawingml/2006/main"/>
           <a:p xmlns:a="http://schemas.openxmlformats.org/drawingml/2006/main">
             <a:r>
-              <a:t>Existing thresholding lesson content.</a:t>
+              <a:t>The code now matches the lesson claim: it requires two consecutive observations, limits the number of scans, exits immediately after success, and guarantees an explicit landing in finally. seesBinary performs a fresh threshold scan and returns a Promise&lt;boolean&gt;.</a:t>
             </a:r>
           </a:p>
           <a:p xmlns:a="http://schemas.openxmlformats.org/drawingml/2006/main">
@@ -918,7 +923,12 @@
           </a:p>
           <a:p xmlns:a="http://schemas.openxmlformats.org/drawingml/2006/main">
             <a:r>
-              <a:t>- Hopper Studio project source and locally generated lesson materials.</a:t>
+              <a:t>- Hopper Studio implementation: local_site/lib/vision.ts, scanThreshold and seesBinary.</a:t>
+            </a:r>
+          </a:p>
+          <a:p xmlns:a="http://schemas.openxmlformats.org/drawingml/2006/main">
+            <a:r>
+              <a:t>- Hopper Studio flight API: local_site/lib/drone.ts.</a:t>
             </a:r>
           </a:p>
           <a:p xmlns:a="http://schemas.openxmlformats.org/drawingml/2006/main">
@@ -1086,7 +1096,7 @@
   </p:cSld>
   <p:clrMap bg1="lt1" tx1="dk1" bg2="lt2" tx2="dk2" accent1="accent1" accent2="accent2" accent3="accent3" accent4="accent4" accent5="accent5" accent6="accent6" hlink="hlink" folHlink="folHlink"/>
   <p:sldLayoutIdLst>
-    <p:sldLayoutId xmlns:r="http://schemas.openxmlformats.org/officeDocument/2006/relationships" id="2147483649" r:id="Rd8da4197566c448f"/>
+    <p:sldLayoutId xmlns:r="http://schemas.openxmlformats.org/officeDocument/2006/relationships" id="2147483649" r:id="R2ba801e1ef7c45e6"/>
   </p:sldLayoutIdLst>
   <p:txStyles>
     <p:titleStyle>
@@ -1616,6 +1626,13 @@
 <file path=ppt/slides/slide1.xml><?xml version="1.0" encoding="utf-8"?>
 <p:sld xmlns:p="http://schemas.openxmlformats.org/presentationml/2006/main">
   <p:cSld>
+    <p:bg>
+      <p:bgPr>
+        <a:solidFill xmlns:a="http://schemas.openxmlformats.org/drawingml/2006/main">
+          <a:srgbClr val="001B3A"/>
+        </a:solidFill>
+      </p:bgPr>
+    </p:bg>
     <p:spTree>
       <p:nvGrpSpPr>
         <p:cNvPr id="1" name=""/>
@@ -1627,23 +1644,23 @@
       </p:grpSpPr>
       <p:pic>
         <p:nvPicPr>
-          <p:cNvPr id="4" name=""/>
+          <p:cNvPr id="14" name=""/>
           <p:cNvPicPr>
             <a:picLocks xmlns:a="http://schemas.openxmlformats.org/drawingml/2006/main" noChangeAspect="1"/>
           </p:cNvPicPr>
           <p:nvPr/>
         </p:nvPicPr>
         <p:blipFill>
-          <a:blip xmlns:r="http://schemas.openxmlformats.org/officeDocument/2006/relationships" xmlns:a="http://schemas.openxmlformats.org/drawingml/2006/main" r:embed="R3f1814c99d184ac6"/>
-          <a:srcRect xmlns:a="http://schemas.openxmlformats.org/drawingml/2006/main" l="0" t="0" r="0" b="0"/>
+          <a:blip xmlns:r="http://schemas.openxmlformats.org/officeDocument/2006/relationships" xmlns:a="http://schemas.openxmlformats.org/drawingml/2006/main" r:embed="R987dc8ffb8914eb2"/>
+          <a:srcRect xmlns:a="http://schemas.openxmlformats.org/drawingml/2006/main" l="0" t="10411" r="0" b="10411"/>
           <a:stretch xmlns:a="http://schemas.openxmlformats.org/drawingml/2006/main">
             <a:fillRect l="0" t="0" r="0" b="0"/>
           </a:stretch>
         </p:blipFill>
         <p:spPr>
           <a:xfrm xmlns:a="http://schemas.openxmlformats.org/drawingml/2006/main">
-            <a:off x="0" y="0"/>
-            <a:ext cx="12192000" cy="6858000"/>
+            <a:off x="5695950" y="0"/>
+            <a:ext cx="6496050" cy="6858000"/>
           </a:xfrm>
           <a:prstGeom xmlns:a="http://schemas.openxmlformats.org/drawingml/2006/main" prst="rect">
             <a:avLst/>
@@ -1655,29 +1672,482 @@
           <p:cNvPr id="2" name="">
             <a:extLst xmlns:a="http://schemas.openxmlformats.org/drawingml/2006/main">
               <a:ext uri="{FF2B5EF4-FFF2-40B4-BE49-F238E27FC236}">
-                <a16:creationId xmlns:a16="http://schemas.microsoft.com/office/drawing/2014/main" id="{C4545650-7E3A-4E04-BDD3-0C8A8089D779}"/>
-              </a:ext>
-            </a:extLst>
-          </p:cNvPr>
-          <p:cNvSpPr>
-            <a:spLocks xmlns:a="http://schemas.openxmlformats.org/drawingml/2006/main" noGrp="1"/>
-          </p:cNvSpPr>
-          <p:nvPr/>
-        </p:nvSpPr>
-        <p:spPr>
-          <a:xfrm xmlns:a="http://schemas.openxmlformats.org/drawingml/2006/main">
-            <a:off x="457200" y="6429375"/>
-            <a:ext cx="2571750" cy="285750"/>
-          </a:xfrm>
-          <a:prstGeom xmlns:a="http://schemas.openxmlformats.org/drawingml/2006/main" prst="rect">
-            <a:avLst/>
+                <a16:creationId xmlns:a16="http://schemas.microsoft.com/office/drawing/2014/main" id="{517938B5-412E-4A73-8C98-BA2317186694}"/>
+              </a:ext>
+            </a:extLst>
+          </p:cNvPr>
+          <p:cNvSpPr>
+            <a:spLocks xmlns:a="http://schemas.openxmlformats.org/drawingml/2006/main" noGrp="1"/>
+          </p:cNvSpPr>
+          <p:nvPr/>
+        </p:nvSpPr>
+        <p:spPr>
+          <a:xfrm xmlns:a="http://schemas.openxmlformats.org/drawingml/2006/main">
+            <a:off x="5524500" y="0"/>
+            <a:ext cx="590550" cy="6858000"/>
+          </a:xfrm>
+          <a:prstGeom xmlns:a="http://schemas.openxmlformats.org/drawingml/2006/main" prst="rect">
+            <a:avLst/>
+          </a:prstGeom>
+          <a:ln xmlns:a="http://schemas.openxmlformats.org/drawingml/2006/main" w="0">
+            <a:noFill/>
+            <a:prstDash val="solid"/>
+          </a:ln>
+        </p:spPr>
+      </p:sp>
+      <p:sp>
+        <p:nvSpPr>
+          <p:cNvPr id="3" name="">
+            <a:extLst xmlns:a="http://schemas.openxmlformats.org/drawingml/2006/main">
+              <a:ext uri="{FF2B5EF4-FFF2-40B4-BE49-F238E27FC236}">
+                <a16:creationId xmlns:a16="http://schemas.microsoft.com/office/drawing/2014/main" id="{400A44E5-118E-4EB4-8334-4A5A6735F9C5}"/>
+              </a:ext>
+            </a:extLst>
+          </p:cNvPr>
+          <p:cNvSpPr>
+            <a:spLocks xmlns:a="http://schemas.openxmlformats.org/drawingml/2006/main" noGrp="1"/>
+          </p:cNvSpPr>
+          <p:nvPr/>
+        </p:nvSpPr>
+        <p:spPr>
+          <a:xfrm xmlns:a="http://schemas.openxmlformats.org/drawingml/2006/main">
+            <a:off x="514350" y="438150"/>
+            <a:ext cx="2381250" cy="838200"/>
+          </a:xfrm>
+          <a:prstGeom xmlns:a="http://schemas.openxmlformats.org/drawingml/2006/main" prst="roundRect">
+            <a:avLst>
+              <a:gd name="adj" fmla="val 13636"/>
+            </a:avLst>
           </a:prstGeom>
           <a:solidFill xmlns:a="http://schemas.openxmlformats.org/drawingml/2006/main">
-            <a:srgbClr val="001B3A"/>
+            <a:srgbClr val="FFFFFF"/>
+          </a:solidFill>
+          <a:ln xmlns:a="http://schemas.openxmlformats.org/drawingml/2006/main" w="14288">
+            <a:solidFill>
+              <a:srgbClr val="FFFFFF"/>
+            </a:solidFill>
+            <a:prstDash val="solid"/>
+          </a:ln>
+        </p:spPr>
+      </p:sp>
+      <p:pic>
+        <p:nvPicPr>
+          <p:cNvPr id="17" name=""/>
+          <p:cNvPicPr>
+            <a:picLocks xmlns:a="http://schemas.openxmlformats.org/drawingml/2006/main" noChangeAspect="1"/>
+          </p:cNvPicPr>
+          <p:nvPr/>
+        </p:nvPicPr>
+        <p:blipFill>
+          <a:blip xmlns:r="http://schemas.openxmlformats.org/officeDocument/2006/relationships" xmlns:a="http://schemas.openxmlformats.org/drawingml/2006/main" r:embed="R3749401f57ba4912"/>
+          <a:stretch xmlns:a="http://schemas.openxmlformats.org/drawingml/2006/main"/>
+        </p:blipFill>
+        <p:spPr>
+          <a:xfrm xmlns:a="http://schemas.openxmlformats.org/drawingml/2006/main">
+            <a:off x="1115994" y="561975"/>
+            <a:ext cx="1177963" cy="590550"/>
+          </a:xfrm>
+          <a:prstGeom xmlns:a="http://schemas.openxmlformats.org/drawingml/2006/main" prst="rect">
+            <a:avLst/>
+          </a:prstGeom>
+        </p:spPr>
+      </p:pic>
+      <p:sp>
+        <p:nvSpPr>
+          <p:cNvPr id="5" name="">
+            <a:extLst xmlns:a="http://schemas.openxmlformats.org/drawingml/2006/main">
+              <a:ext uri="{FF2B5EF4-FFF2-40B4-BE49-F238E27FC236}">
+                <a16:creationId xmlns:a16="http://schemas.microsoft.com/office/drawing/2014/main" id="{D32C64A8-1D16-4A0C-8C1D-C9B10F18A3A6}"/>
+              </a:ext>
+            </a:extLst>
+          </p:cNvPr>
+          <p:cNvSpPr>
+            <a:spLocks xmlns:a="http://schemas.openxmlformats.org/drawingml/2006/main" noGrp="1"/>
+          </p:cNvSpPr>
+          <p:nvPr/>
+        </p:nvSpPr>
+        <p:spPr>
+          <a:xfrm xmlns:a="http://schemas.openxmlformats.org/drawingml/2006/main">
+            <a:off x="552450" y="1752600"/>
+            <a:ext cx="3810000" cy="228600"/>
+          </a:xfrm>
+          <a:prstGeom xmlns:a="http://schemas.openxmlformats.org/drawingml/2006/main" prst="rect">
+            <a:avLst/>
+          </a:prstGeom>
+          <a:noFill xmlns:a="http://schemas.openxmlformats.org/drawingml/2006/main"/>
+          <a:ln xmlns:a="http://schemas.openxmlformats.org/drawingml/2006/main" w="0">
+            <a:noFill/>
+            <a:prstDash val="solid"/>
+          </a:ln>
+        </p:spPr>
+        <p:txBody>
+          <a:bodyPr xmlns:a="http://schemas.openxmlformats.org/drawingml/2006/main"/>
+          <a:lstStyle xmlns:a="http://schemas.openxmlformats.org/drawingml/2006/main"/>
+          <a:p xmlns:a="http://schemas.openxmlformats.org/drawingml/2006/main">
+            <a:pPr>
+              <a:defRPr sz="975" b="1">
+                <a:solidFill>
+                  <a:srgbClr val="14B8B4"/>
+                </a:solidFill>
+              </a:defRPr>
+            </a:pPr>
+            <a:r>
+              <a:rPr sz="975" b="1">
+                <a:solidFill>
+                  <a:srgbClr val="14B8B4"/>
+                </a:solidFill>
+              </a:rPr>
+              <a:t>HOPPER INFORMATION SERIES</a:t>
+            </a:r>
+          </a:p>
+        </p:txBody>
+      </p:sp>
+      <p:sp>
+        <p:nvSpPr>
+          <p:cNvPr id="6" name="">
+            <a:extLst xmlns:a="http://schemas.openxmlformats.org/drawingml/2006/main">
+              <a:ext uri="{FF2B5EF4-FFF2-40B4-BE49-F238E27FC236}">
+                <a16:creationId xmlns:a16="http://schemas.microsoft.com/office/drawing/2014/main" id="{41D5C62E-2396-4ADA-A5E0-7EFCEEDBFB17}"/>
+              </a:ext>
+            </a:extLst>
+          </p:cNvPr>
+          <p:cNvSpPr>
+            <a:spLocks xmlns:a="http://schemas.openxmlformats.org/drawingml/2006/main" noGrp="1"/>
+          </p:cNvSpPr>
+          <p:nvPr/>
+        </p:nvSpPr>
+        <p:spPr>
+          <a:xfrm xmlns:a="http://schemas.openxmlformats.org/drawingml/2006/main">
+            <a:off x="552450" y="2047875"/>
+            <a:ext cx="4095750" cy="209550"/>
+          </a:xfrm>
+          <a:prstGeom xmlns:a="http://schemas.openxmlformats.org/drawingml/2006/main" prst="rect">
+            <a:avLst/>
+          </a:prstGeom>
+          <a:noFill xmlns:a="http://schemas.openxmlformats.org/drawingml/2006/main"/>
+          <a:ln xmlns:a="http://schemas.openxmlformats.org/drawingml/2006/main" w="0">
+            <a:noFill/>
+            <a:prstDash val="solid"/>
+          </a:ln>
+        </p:spPr>
+        <p:txBody>
+          <a:bodyPr xmlns:a="http://schemas.openxmlformats.org/drawingml/2006/main"/>
+          <a:lstStyle xmlns:a="http://schemas.openxmlformats.org/drawingml/2006/main"/>
+          <a:p xmlns:a="http://schemas.openxmlformats.org/drawingml/2006/main">
+            <a:pPr>
+              <a:defRPr sz="900" b="1">
+                <a:solidFill>
+                  <a:srgbClr val="C9A227"/>
+                </a:solidFill>
+              </a:defRPr>
+            </a:pPr>
+            <a:r>
+              <a:rPr sz="900" b="1">
+                <a:solidFill>
+                  <a:srgbClr val="C9A227"/>
+                </a:solidFill>
+              </a:rPr>
+              <a:t>THRESHOLDING</a:t>
+            </a:r>
+          </a:p>
+        </p:txBody>
+      </p:sp>
+      <p:sp>
+        <p:nvSpPr>
+          <p:cNvPr id="7" name="">
+            <a:extLst xmlns:a="http://schemas.openxmlformats.org/drawingml/2006/main">
+              <a:ext uri="{FF2B5EF4-FFF2-40B4-BE49-F238E27FC236}">
+                <a16:creationId xmlns:a16="http://schemas.microsoft.com/office/drawing/2014/main" id="{7A5AC378-0B53-4ED4-B2A2-954C65D65386}"/>
+              </a:ext>
+            </a:extLst>
+          </p:cNvPr>
+          <p:cNvSpPr>
+            <a:spLocks xmlns:a="http://schemas.openxmlformats.org/drawingml/2006/main" noGrp="1"/>
+          </p:cNvSpPr>
+          <p:nvPr/>
+        </p:nvSpPr>
+        <p:spPr>
+          <a:xfrm xmlns:a="http://schemas.openxmlformats.org/drawingml/2006/main">
+            <a:off x="552450" y="2457450"/>
+            <a:ext cx="4572000" cy="1619250"/>
+          </a:xfrm>
+          <a:prstGeom xmlns:a="http://schemas.openxmlformats.org/drawingml/2006/main" prst="rect">
+            <a:avLst/>
+          </a:prstGeom>
+          <a:noFill xmlns:a="http://schemas.openxmlformats.org/drawingml/2006/main"/>
+          <a:ln xmlns:a="http://schemas.openxmlformats.org/drawingml/2006/main" w="0">
+            <a:noFill/>
+            <a:prstDash val="solid"/>
+          </a:ln>
+        </p:spPr>
+        <p:txBody>
+          <a:bodyPr xmlns:a="http://schemas.openxmlformats.org/drawingml/2006/main" anchor="ctr"/>
+          <a:lstStyle xmlns:a="http://schemas.openxmlformats.org/drawingml/2006/main"/>
+          <a:p xmlns:a="http://schemas.openxmlformats.org/drawingml/2006/main">
+            <a:pPr>
+              <a:defRPr sz="4050" b="1">
+                <a:solidFill>
+                  <a:srgbClr val="FFFFFF"/>
+                </a:solidFill>
+              </a:defRPr>
+            </a:pPr>
+            <a:r>
+              <a:rPr sz="4050" b="1">
+                <a:solidFill>
+                  <a:srgbClr val="FFFFFF"/>
+                </a:solidFill>
+              </a:rPr>
+              <a:t>Thresholding with Hopper</a:t>
+            </a:r>
+          </a:p>
+        </p:txBody>
+      </p:sp>
+      <p:sp>
+        <p:nvSpPr>
+          <p:cNvPr id="8" name="">
+            <a:extLst xmlns:a="http://schemas.openxmlformats.org/drawingml/2006/main">
+              <a:ext uri="{FF2B5EF4-FFF2-40B4-BE49-F238E27FC236}">
+                <a16:creationId xmlns:a16="http://schemas.microsoft.com/office/drawing/2014/main" id="{02A9C536-0A8C-41D6-BDF4-127EB33CD886}"/>
+              </a:ext>
+            </a:extLst>
+          </p:cNvPr>
+          <p:cNvSpPr>
+            <a:spLocks xmlns:a="http://schemas.openxmlformats.org/drawingml/2006/main" noGrp="1"/>
+          </p:cNvSpPr>
+          <p:nvPr/>
+        </p:nvSpPr>
+        <p:spPr>
+          <a:xfrm xmlns:a="http://schemas.openxmlformats.org/drawingml/2006/main">
+            <a:off x="552450" y="4238625"/>
+            <a:ext cx="4667250" cy="819150"/>
+          </a:xfrm>
+          <a:prstGeom xmlns:a="http://schemas.openxmlformats.org/drawingml/2006/main" prst="rect">
+            <a:avLst/>
+          </a:prstGeom>
+          <a:noFill xmlns:a="http://schemas.openxmlformats.org/drawingml/2006/main"/>
+          <a:ln xmlns:a="http://schemas.openxmlformats.org/drawingml/2006/main" w="0">
+            <a:noFill/>
+            <a:prstDash val="solid"/>
+          </a:ln>
+        </p:spPr>
+        <p:txBody>
+          <a:bodyPr xmlns:a="http://schemas.openxmlformats.org/drawingml/2006/main"/>
+          <a:lstStyle xmlns:a="http://schemas.openxmlformats.org/drawingml/2006/main"/>
+          <a:p xmlns:a="http://schemas.openxmlformats.org/drawingml/2006/main">
+            <a:pPr>
+              <a:defRPr sz="1500">
+                <a:solidFill>
+                  <a:srgbClr val="D4E2E8"/>
+                </a:solidFill>
+              </a:defRPr>
+            </a:pPr>
+            <a:r>
+              <a:rPr sz="1500">
+                <a:solidFill>
+                  <a:srgbClr val="D4E2E8"/>
+                </a:solidFill>
+              </a:rPr>
+              <a:t>Turn camera brightness into an explainable binary measurement—and test it safely in a real room.</a:t>
+            </a:r>
+          </a:p>
+        </p:txBody>
+      </p:sp>
+      <p:sp>
+        <p:nvSpPr>
+          <p:cNvPr id="9" name="">
+            <a:extLst xmlns:a="http://schemas.openxmlformats.org/drawingml/2006/main">
+              <a:ext uri="{FF2B5EF4-FFF2-40B4-BE49-F238E27FC236}">
+                <a16:creationId xmlns:a16="http://schemas.microsoft.com/office/drawing/2014/main" id="{56777E8A-1201-43C5-9858-A9C6280D884F}"/>
+              </a:ext>
+            </a:extLst>
+          </p:cNvPr>
+          <p:cNvSpPr>
+            <a:spLocks xmlns:a="http://schemas.openxmlformats.org/drawingml/2006/main" noGrp="1"/>
+          </p:cNvSpPr>
+          <p:nvPr/>
+        </p:nvSpPr>
+        <p:spPr>
+          <a:xfrm xmlns:a="http://schemas.openxmlformats.org/drawingml/2006/main">
+            <a:off x="552450" y="5372100"/>
+            <a:ext cx="952500" cy="304800"/>
+          </a:xfrm>
+          <a:prstGeom xmlns:a="http://schemas.openxmlformats.org/drawingml/2006/main" prst="roundRect">
+            <a:avLst>
+              <a:gd name="adj" fmla="val 50000"/>
+            </a:avLst>
+          </a:prstGeom>
+          <a:solidFill xmlns:a="http://schemas.openxmlformats.org/drawingml/2006/main">
+            <a:srgbClr val="123654"/>
+          </a:solidFill>
+          <a:ln xmlns:a="http://schemas.openxmlformats.org/drawingml/2006/main" w="14288">
+            <a:solidFill>
+              <a:srgbClr val="123654"/>
+            </a:solidFill>
+            <a:prstDash val="solid"/>
+          </a:ln>
+        </p:spPr>
+        <p:txBody>
+          <a:bodyPr xmlns:a="http://schemas.openxmlformats.org/drawingml/2006/main"/>
+          <a:lstStyle xmlns:a="http://schemas.openxmlformats.org/drawingml/2006/main"/>
+          <a:p xmlns:a="http://schemas.openxmlformats.org/drawingml/2006/main">
+            <a:pPr algn="ctr">
+              <a:defRPr sz="1050" b="1">
+                <a:solidFill>
+                  <a:srgbClr val="FFFFFF"/>
+                </a:solidFill>
+              </a:defRPr>
+            </a:pPr>
+            <a:r>
+              <a:rPr sz="1050" b="1">
+                <a:solidFill>
+                  <a:srgbClr val="FFFFFF"/>
+                </a:solidFill>
+              </a:rPr>
+              <a:t>PIXELS</a:t>
+            </a:r>
+          </a:p>
+        </p:txBody>
+      </p:sp>
+      <p:sp>
+        <p:nvSpPr>
+          <p:cNvPr id="10" name="">
+            <a:extLst xmlns:a="http://schemas.openxmlformats.org/drawingml/2006/main">
+              <a:ext uri="{FF2B5EF4-FFF2-40B4-BE49-F238E27FC236}">
+                <a16:creationId xmlns:a16="http://schemas.microsoft.com/office/drawing/2014/main" id="{46381B29-8EBC-4571-9ADE-8C4FD99F8057}"/>
+              </a:ext>
+            </a:extLst>
+          </p:cNvPr>
+          <p:cNvSpPr>
+            <a:spLocks xmlns:a="http://schemas.openxmlformats.org/drawingml/2006/main" noGrp="1"/>
+          </p:cNvSpPr>
+          <p:nvPr/>
+        </p:nvSpPr>
+        <p:spPr>
+          <a:xfrm xmlns:a="http://schemas.openxmlformats.org/drawingml/2006/main">
+            <a:off x="1619250" y="5372100"/>
+            <a:ext cx="1447800" cy="304800"/>
+          </a:xfrm>
+          <a:prstGeom xmlns:a="http://schemas.openxmlformats.org/drawingml/2006/main" prst="roundRect">
+            <a:avLst>
+              <a:gd name="adj" fmla="val 50000"/>
+            </a:avLst>
+          </a:prstGeom>
+          <a:solidFill xmlns:a="http://schemas.openxmlformats.org/drawingml/2006/main">
+            <a:srgbClr val="123654"/>
+          </a:solidFill>
+          <a:ln xmlns:a="http://schemas.openxmlformats.org/drawingml/2006/main" w="14288">
+            <a:solidFill>
+              <a:srgbClr val="123654"/>
+            </a:solidFill>
+            <a:prstDash val="solid"/>
+          </a:ln>
+        </p:spPr>
+        <p:txBody>
+          <a:bodyPr xmlns:a="http://schemas.openxmlformats.org/drawingml/2006/main"/>
+          <a:lstStyle xmlns:a="http://schemas.openxmlformats.org/drawingml/2006/main"/>
+          <a:p xmlns:a="http://schemas.openxmlformats.org/drawingml/2006/main">
+            <a:pPr algn="ctr">
+              <a:defRPr sz="1050" b="1">
+                <a:solidFill>
+                  <a:srgbClr val="FFFFFF"/>
+                </a:solidFill>
+              </a:defRPr>
+            </a:pPr>
+            <a:r>
+              <a:rPr sz="1050" b="1">
+                <a:solidFill>
+                  <a:srgbClr val="FFFFFF"/>
+                </a:solidFill>
+              </a:rPr>
+              <a:t>BINARY MASKS</a:t>
+            </a:r>
+          </a:p>
+        </p:txBody>
+      </p:sp>
+      <p:sp>
+        <p:nvSpPr>
+          <p:cNvPr id="11" name="">
+            <a:extLst xmlns:a="http://schemas.openxmlformats.org/drawingml/2006/main">
+              <a:ext uri="{FF2B5EF4-FFF2-40B4-BE49-F238E27FC236}">
+                <a16:creationId xmlns:a16="http://schemas.microsoft.com/office/drawing/2014/main" id="{58D6CFD2-C40C-44FC-858F-9B92954CF4FD}"/>
+              </a:ext>
+            </a:extLst>
+          </p:cNvPr>
+          <p:cNvSpPr>
+            <a:spLocks xmlns:a="http://schemas.openxmlformats.org/drawingml/2006/main" noGrp="1"/>
+          </p:cNvSpPr>
+          <p:nvPr/>
+        </p:nvSpPr>
+        <p:spPr>
+          <a:xfrm xmlns:a="http://schemas.openxmlformats.org/drawingml/2006/main">
+            <a:off x="3181350" y="5372100"/>
+            <a:ext cx="1600200" cy="304800"/>
+          </a:xfrm>
+          <a:prstGeom xmlns:a="http://schemas.openxmlformats.org/drawingml/2006/main" prst="roundRect">
+            <a:avLst>
+              <a:gd name="adj" fmla="val 50000"/>
+            </a:avLst>
+          </a:prstGeom>
+          <a:solidFill xmlns:a="http://schemas.openxmlformats.org/drawingml/2006/main">
+            <a:srgbClr val="008C95"/>
+          </a:solidFill>
+          <a:ln xmlns:a="http://schemas.openxmlformats.org/drawingml/2006/main" w="14288">
+            <a:solidFill>
+              <a:srgbClr val="008C95"/>
+            </a:solidFill>
+            <a:prstDash val="solid"/>
+          </a:ln>
+        </p:spPr>
+        <p:txBody>
+          <a:bodyPr xmlns:a="http://schemas.openxmlformats.org/drawingml/2006/main"/>
+          <a:lstStyle xmlns:a="http://schemas.openxmlformats.org/drawingml/2006/main"/>
+          <a:p xmlns:a="http://schemas.openxmlformats.org/drawingml/2006/main">
+            <a:pPr algn="ctr">
+              <a:defRPr sz="1050" b="1">
+                <a:solidFill>
+                  <a:srgbClr val="FFFFFF"/>
+                </a:solidFill>
+              </a:defRPr>
+            </a:pPr>
+            <a:r>
+              <a:rPr sz="1050" b="1">
+                <a:solidFill>
+                  <a:srgbClr val="FFFFFF"/>
+                </a:solidFill>
+              </a:rPr>
+              <a:t>SAFE DECISIONS</a:t>
+            </a:r>
+          </a:p>
+        </p:txBody>
+      </p:sp>
+      <p:sp>
+        <p:nvSpPr>
+          <p:cNvPr id="12" name="">
+            <a:extLst xmlns:a="http://schemas.openxmlformats.org/drawingml/2006/main">
+              <a:ext uri="{FF2B5EF4-FFF2-40B4-BE49-F238E27FC236}">
+                <a16:creationId xmlns:a16="http://schemas.microsoft.com/office/drawing/2014/main" id="{2F0CABE5-2CDD-4CA8-852D-7E1AFD623433}"/>
+              </a:ext>
+            </a:extLst>
+          </p:cNvPr>
+          <p:cNvSpPr>
+            <a:spLocks xmlns:a="http://schemas.openxmlformats.org/drawingml/2006/main" noGrp="1"/>
+          </p:cNvSpPr>
+          <p:nvPr/>
+        </p:nvSpPr>
+        <p:spPr>
+          <a:xfrm xmlns:a="http://schemas.openxmlformats.org/drawingml/2006/main">
+            <a:off x="552450" y="6419850"/>
+            <a:ext cx="4400550" cy="9525"/>
+          </a:xfrm>
+          <a:prstGeom xmlns:a="http://schemas.openxmlformats.org/drawingml/2006/main" prst="rect">
+            <a:avLst/>
+          </a:prstGeom>
+          <a:solidFill xmlns:a="http://schemas.openxmlformats.org/drawingml/2006/main">
+            <a:srgbClr val="33556E"/>
           </a:solidFill>
           <a:ln xmlns:a="http://schemas.openxmlformats.org/drawingml/2006/main" w="0">
             <a:solidFill>
-              <a:srgbClr val="001B3A"/>
+              <a:srgbClr val="33556E"/>
             </a:solidFill>
             <a:prstDash val="solid"/>
           </a:ln>
@@ -1685,22 +2155,22 @@
       </p:sp>
       <p:sp>
         <p:nvSpPr>
-          <p:cNvPr id="3" name="">
-            <a:extLst xmlns:a="http://schemas.openxmlformats.org/drawingml/2006/main">
-              <a:ext uri="{FF2B5EF4-FFF2-40B4-BE49-F238E27FC236}">
-                <a16:creationId xmlns:a16="http://schemas.microsoft.com/office/drawing/2014/main" id="{95ED92C8-1A70-4D7B-9413-C7F9ADEB797E}"/>
-              </a:ext>
-            </a:extLst>
-          </p:cNvPr>
-          <p:cNvSpPr>
-            <a:spLocks xmlns:a="http://schemas.openxmlformats.org/drawingml/2006/main" noGrp="1"/>
-          </p:cNvSpPr>
-          <p:nvPr/>
-        </p:nvSpPr>
-        <p:spPr>
-          <a:xfrm xmlns:a="http://schemas.openxmlformats.org/drawingml/2006/main">
-            <a:off x="609600" y="6534150"/>
-            <a:ext cx="2190750" cy="142875"/>
+          <p:cNvPr id="13" name="">
+            <a:extLst xmlns:a="http://schemas.openxmlformats.org/drawingml/2006/main">
+              <a:ext uri="{FF2B5EF4-FFF2-40B4-BE49-F238E27FC236}">
+                <a16:creationId xmlns:a16="http://schemas.microsoft.com/office/drawing/2014/main" id="{227146E7-508F-4EC2-A546-B937A6FC2803}"/>
+              </a:ext>
+            </a:extLst>
+          </p:cNvPr>
+          <p:cNvSpPr>
+            <a:spLocks xmlns:a="http://schemas.openxmlformats.org/drawingml/2006/main" noGrp="1"/>
+          </p:cNvSpPr>
+          <p:nvPr/>
+        </p:nvSpPr>
+        <p:spPr>
+          <a:xfrm xmlns:a="http://schemas.openxmlformats.org/drawingml/2006/main">
+            <a:off x="552450" y="6543675"/>
+            <a:ext cx="3048000" cy="152400"/>
           </a:xfrm>
           <a:prstGeom xmlns:a="http://schemas.openxmlformats.org/drawingml/2006/main" prst="rect">
             <a:avLst/>
@@ -1716,19 +2186,19 @@
           <a:lstStyle xmlns:a="http://schemas.openxmlformats.org/drawingml/2006/main"/>
           <a:p xmlns:a="http://schemas.openxmlformats.org/drawingml/2006/main">
             <a:pPr>
-              <a:defRPr sz="675">
-                <a:solidFill>
-                  <a:srgbClr val="9EB4C0"/>
+              <a:defRPr sz="750">
+                <a:solidFill>
+                  <a:srgbClr val="94AFBC"/>
                 </a:solidFill>
               </a:defRPr>
             </a:pPr>
             <a:r>
-              <a:rPr sz="675">
-                <a:solidFill>
-                  <a:srgbClr val="9EB4C0"/>
-                </a:solidFill>
-              </a:rPr>
-              <a:t>DECK 05  |  7 SLIDES</a:t>
+              <a:rPr sz="750">
+                <a:solidFill>
+                  <a:srgbClr val="94AFBC"/>
+                </a:solidFill>
+              </a:rPr>
+              <a:t>DECK 05  |  THRESHOLDING</a:t>
             </a:r>
           </a:p>
         </p:txBody>
@@ -1736,7 +2206,7 @@
     </p:spTree>
     <p:extLst>
       <p:ext uri="{BB962C8B-B14F-4D97-AF65-F5344CB8AC3E}">
-        <p14:creationId xmlns:p14="http://schemas.microsoft.com/office/powerpoint/2010/main" val="334600600"/>
+        <p14:creationId xmlns:p14="http://schemas.microsoft.com/office/powerpoint/2010/main" val="1810842138"/>
       </p:ext>
     </p:extLst>
   </p:cSld>
@@ -1764,7 +2234,7 @@
           <p:nvPr/>
         </p:nvPicPr>
         <p:blipFill>
-          <a:blip xmlns:r="http://schemas.openxmlformats.org/officeDocument/2006/relationships" xmlns:a="http://schemas.openxmlformats.org/drawingml/2006/main" r:embed="R46ceeabb72bd4e5a"/>
+          <a:blip xmlns:r="http://schemas.openxmlformats.org/officeDocument/2006/relationships" xmlns:a="http://schemas.openxmlformats.org/drawingml/2006/main" r:embed="R9b2b33c31cd4448e"/>
           <a:srcRect xmlns:a="http://schemas.openxmlformats.org/drawingml/2006/main" l="0" t="0" r="0" b="0"/>
           <a:stretch xmlns:a="http://schemas.openxmlformats.org/drawingml/2006/main">
             <a:fillRect l="0" t="0" r="0" b="0"/>
@@ -1785,7 +2255,7 @@
           <p:cNvPr id="2" name="">
             <a:extLst xmlns:a="http://schemas.openxmlformats.org/drawingml/2006/main">
               <a:ext uri="{FF2B5EF4-FFF2-40B4-BE49-F238E27FC236}">
-                <a16:creationId xmlns:a16="http://schemas.microsoft.com/office/drawing/2014/main" id="{5AB450C3-33A6-4C01-A383-81A980C7FF93}"/>
+                <a16:creationId xmlns:a16="http://schemas.microsoft.com/office/drawing/2014/main" id="{7FAF14E9-4647-451A-9343-D9345F7579BF}"/>
               </a:ext>
             </a:extLst>
           </p:cNvPr>
@@ -1818,7 +2288,7 @@
           <p:cNvPr id="3" name="">
             <a:extLst xmlns:a="http://schemas.openxmlformats.org/drawingml/2006/main">
               <a:ext uri="{FF2B5EF4-FFF2-40B4-BE49-F238E27FC236}">
-                <a16:creationId xmlns:a16="http://schemas.microsoft.com/office/drawing/2014/main" id="{BC04E537-7AA0-4F01-B31A-FA396647A05F}"/>
+                <a16:creationId xmlns:a16="http://schemas.microsoft.com/office/drawing/2014/main" id="{1725B4BB-3C81-4683-A93E-4867241D3F8E}"/>
               </a:ext>
             </a:extLst>
           </p:cNvPr>
@@ -1868,7 +2338,7 @@
           <p:cNvPr id="4" name="">
             <a:extLst xmlns:a="http://schemas.openxmlformats.org/drawingml/2006/main">
               <a:ext uri="{FF2B5EF4-FFF2-40B4-BE49-F238E27FC236}">
-                <a16:creationId xmlns:a16="http://schemas.microsoft.com/office/drawing/2014/main" id="{02A3E29B-0C0B-4756-A4BE-84D7ABBEC4B3}"/>
+                <a16:creationId xmlns:a16="http://schemas.microsoft.com/office/drawing/2014/main" id="{967F916B-FC2F-4033-8500-16403F798EA9}"/>
               </a:ext>
             </a:extLst>
           </p:cNvPr>
@@ -1901,7 +2371,7 @@
           <p:cNvPr id="5" name="">
             <a:extLst xmlns:a="http://schemas.openxmlformats.org/drawingml/2006/main">
               <a:ext uri="{FF2B5EF4-FFF2-40B4-BE49-F238E27FC236}">
-                <a16:creationId xmlns:a16="http://schemas.microsoft.com/office/drawing/2014/main" id="{7C6DE7FE-F2F9-434C-BC74-F252AEE369F6}"/>
+                <a16:creationId xmlns:a16="http://schemas.microsoft.com/office/drawing/2014/main" id="{0A3F6A2B-A1C3-4CD7-8A3F-1460D79FA391}"/>
               </a:ext>
             </a:extLst>
           </p:cNvPr>
@@ -1949,7 +2419,7 @@
     </p:spTree>
     <p:extLst>
       <p:ext uri="{BB962C8B-B14F-4D97-AF65-F5344CB8AC3E}">
-        <p14:creationId xmlns:p14="http://schemas.microsoft.com/office/powerpoint/2010/main" val="1207420677"/>
+        <p14:creationId xmlns:p14="http://schemas.microsoft.com/office/powerpoint/2010/main" val="161524264"/>
       </p:ext>
     </p:extLst>
   </p:cSld>
@@ -1980,7 +2450,7 @@
           <p:cNvPr id="27" name="">
             <a:extLst xmlns:a="http://schemas.openxmlformats.org/drawingml/2006/main">
               <a:ext uri="{FF2B5EF4-FFF2-40B4-BE49-F238E27FC236}">
-                <a16:creationId xmlns:a16="http://schemas.microsoft.com/office/drawing/2014/main" id="{4032EEBB-78D8-4A72-A965-BE6662EB1E40}"/>
+                <a16:creationId xmlns:a16="http://schemas.microsoft.com/office/drawing/2014/main" id="{4AC7A1A7-5649-4FAD-9189-6B680FFD989F}"/>
               </a:ext>
             </a:extLst>
           </p:cNvPr>
@@ -2013,7 +2483,7 @@
           <p:cNvPr id="2" name="">
             <a:extLst xmlns:a="http://schemas.openxmlformats.org/drawingml/2006/main">
               <a:ext uri="{FF2B5EF4-FFF2-40B4-BE49-F238E27FC236}">
-                <a16:creationId xmlns:a16="http://schemas.microsoft.com/office/drawing/2014/main" id="{BB9B83FE-0567-4CB4-960B-B7B606633808}"/>
+                <a16:creationId xmlns:a16="http://schemas.microsoft.com/office/drawing/2014/main" id="{D46803BD-8B2E-4DC9-9E4D-F101388687B2}"/>
               </a:ext>
             </a:extLst>
           </p:cNvPr>
@@ -2046,7 +2516,7 @@
           <p:cNvPr id="3" name="">
             <a:extLst xmlns:a="http://schemas.openxmlformats.org/drawingml/2006/main">
               <a:ext uri="{FF2B5EF4-FFF2-40B4-BE49-F238E27FC236}">
-                <a16:creationId xmlns:a16="http://schemas.microsoft.com/office/drawing/2014/main" id="{A05ECC45-E68C-4EB5-BAE8-790131DA9373}"/>
+                <a16:creationId xmlns:a16="http://schemas.microsoft.com/office/drawing/2014/main" id="{B86FA0FC-8C3E-45A0-B8C9-D100F18E275A}"/>
               </a:ext>
             </a:extLst>
           </p:cNvPr>
@@ -2096,7 +2566,7 @@
           <p:cNvPr id="4" name="">
             <a:extLst xmlns:a="http://schemas.openxmlformats.org/drawingml/2006/main">
               <a:ext uri="{FF2B5EF4-FFF2-40B4-BE49-F238E27FC236}">
-                <a16:creationId xmlns:a16="http://schemas.microsoft.com/office/drawing/2014/main" id="{C57A1A44-CFA1-4230-A689-C682B529A167}"/>
+                <a16:creationId xmlns:a16="http://schemas.microsoft.com/office/drawing/2014/main" id="{600C0DF5-8A93-4862-A86C-F24C4B51EDFF}"/>
               </a:ext>
             </a:extLst>
           </p:cNvPr>
@@ -2146,7 +2616,7 @@
           <p:cNvPr id="5" name="">
             <a:extLst xmlns:a="http://schemas.openxmlformats.org/drawingml/2006/main">
               <a:ext uri="{FF2B5EF4-FFF2-40B4-BE49-F238E27FC236}">
-                <a16:creationId xmlns:a16="http://schemas.microsoft.com/office/drawing/2014/main" id="{399AB3F3-F2EC-4CC7-ADB8-488AF498A011}"/>
+                <a16:creationId xmlns:a16="http://schemas.microsoft.com/office/drawing/2014/main" id="{05D3B810-2E2F-4205-A458-744BF7E030A3}"/>
               </a:ext>
             </a:extLst>
           </p:cNvPr>
@@ -2200,7 +2670,7 @@
           <p:nvPr/>
         </p:nvPicPr>
         <p:blipFill>
-          <a:blip xmlns:r="http://schemas.openxmlformats.org/officeDocument/2006/relationships" xmlns:a="http://schemas.openxmlformats.org/drawingml/2006/main" r:embed="R0ecbd2dd641445ef"/>
+          <a:blip xmlns:r="http://schemas.openxmlformats.org/officeDocument/2006/relationships" xmlns:a="http://schemas.openxmlformats.org/drawingml/2006/main" r:embed="R083c6921c9e84826"/>
           <a:stretch xmlns:a="http://schemas.openxmlformats.org/drawingml/2006/main"/>
         </p:blipFill>
         <p:spPr>
@@ -2218,7 +2688,7 @@
           <p:cNvPr id="7" name="">
             <a:extLst xmlns:a="http://schemas.openxmlformats.org/drawingml/2006/main">
               <a:ext uri="{FF2B5EF4-FFF2-40B4-BE49-F238E27FC236}">
-                <a16:creationId xmlns:a16="http://schemas.microsoft.com/office/drawing/2014/main" id="{56942967-C94D-4C87-945D-4BA23437891D}"/>
+                <a16:creationId xmlns:a16="http://schemas.microsoft.com/office/drawing/2014/main" id="{3AD75B47-7551-4074-AF77-A74B5550C00A}"/>
               </a:ext>
             </a:extLst>
           </p:cNvPr>
@@ -2251,7 +2721,7 @@
           <p:cNvPr id="8" name="">
             <a:extLst xmlns:a="http://schemas.openxmlformats.org/drawingml/2006/main">
               <a:ext uri="{FF2B5EF4-FFF2-40B4-BE49-F238E27FC236}">
-                <a16:creationId xmlns:a16="http://schemas.microsoft.com/office/drawing/2014/main" id="{E8B3B78A-54B2-4F9E-BDD3-0BAD08AA3C56}"/>
+                <a16:creationId xmlns:a16="http://schemas.microsoft.com/office/drawing/2014/main" id="{E373765D-979B-4BCF-88FE-94DF0DCD7A33}"/>
               </a:ext>
             </a:extLst>
           </p:cNvPr>
@@ -2301,7 +2771,7 @@
           <p:cNvPr id="9" name="">
             <a:extLst xmlns:a="http://schemas.openxmlformats.org/drawingml/2006/main">
               <a:ext uri="{FF2B5EF4-FFF2-40B4-BE49-F238E27FC236}">
-                <a16:creationId xmlns:a16="http://schemas.microsoft.com/office/drawing/2014/main" id="{5F294CB5-B2CF-4413-8329-01A3780E0629}"/>
+                <a16:creationId xmlns:a16="http://schemas.microsoft.com/office/drawing/2014/main" id="{BCB4E9B1-A8C1-49CA-9E3B-FBDDCF133148}"/>
               </a:ext>
             </a:extLst>
           </p:cNvPr>
@@ -2351,7 +2821,7 @@
           <p:cNvPr id="10" name="">
             <a:extLst xmlns:a="http://schemas.openxmlformats.org/drawingml/2006/main">
               <a:ext uri="{FF2B5EF4-FFF2-40B4-BE49-F238E27FC236}">
-                <a16:creationId xmlns:a16="http://schemas.microsoft.com/office/drawing/2014/main" id="{C0F79085-FE45-4E90-A5D4-9CAAF5B16C54}"/>
+                <a16:creationId xmlns:a16="http://schemas.microsoft.com/office/drawing/2014/main" id="{45129961-3108-42DD-9859-D8F12F46F82D}"/>
               </a:ext>
             </a:extLst>
           </p:cNvPr>
@@ -2386,7 +2856,7 @@
           <p:cNvPr id="11" name="">
             <a:extLst xmlns:a="http://schemas.openxmlformats.org/drawingml/2006/main">
               <a:ext uri="{FF2B5EF4-FFF2-40B4-BE49-F238E27FC236}">
-                <a16:creationId xmlns:a16="http://schemas.microsoft.com/office/drawing/2014/main" id="{F556BEE9-444D-4ED8-BC9F-A57BF77559DB}"/>
+                <a16:creationId xmlns:a16="http://schemas.microsoft.com/office/drawing/2014/main" id="{64405F24-66F3-42A9-A933-83587769C875}"/>
               </a:ext>
             </a:extLst>
           </p:cNvPr>
@@ -2419,7 +2889,7 @@
           <p:cNvPr id="12" name="">
             <a:extLst xmlns:a="http://schemas.openxmlformats.org/drawingml/2006/main">
               <a:ext uri="{FF2B5EF4-FFF2-40B4-BE49-F238E27FC236}">
-                <a16:creationId xmlns:a16="http://schemas.microsoft.com/office/drawing/2014/main" id="{77BB31BB-85F5-4651-8827-237BBFA3CA5F}"/>
+                <a16:creationId xmlns:a16="http://schemas.microsoft.com/office/drawing/2014/main" id="{37AC8C28-6DF9-433A-A9AF-2473DEDED7E3}"/>
               </a:ext>
             </a:extLst>
           </p:cNvPr>
@@ -2473,10 +2943,10 @@
           <p:nvPr/>
         </p:nvPicPr>
         <p:blipFill>
-          <a:blip xmlns:r="http://schemas.openxmlformats.org/officeDocument/2006/relationships" xmlns:a="http://schemas.openxmlformats.org/drawingml/2006/main" r:embed="Rb63d26098c9a466a">
+          <a:blip xmlns:r="http://schemas.openxmlformats.org/officeDocument/2006/relationships" xmlns:a="http://schemas.openxmlformats.org/drawingml/2006/main" r:embed="R2b10c824c5ae41bb">
             <a:extLst>
               <a:ext uri="{96DAC541-7B7A-43D3-8B79-37D633B846F1}">
-                <asvg:svgBlip xmlns:asvg="http://schemas.microsoft.com/office/drawing/2016/SVG/main" r:embed="Raa487a540802408f"/>
+                <asvg:svgBlip xmlns:asvg="http://schemas.microsoft.com/office/drawing/2016/SVG/main" r:embed="R2389bf9062b142f8"/>
               </a:ext>
             </a:extLst>
           </a:blip>
@@ -2484,8 +2954,8 @@
         </p:blipFill>
         <p:spPr>
           <a:xfrm xmlns:a="http://schemas.openxmlformats.org/drawingml/2006/main">
-            <a:off x="857250" y="2076450"/>
-            <a:ext cx="4267200" cy="590550"/>
+            <a:off x="895350" y="2207039"/>
+            <a:ext cx="4191000" cy="253172"/>
           </a:xfrm>
           <a:prstGeom xmlns:a="http://schemas.openxmlformats.org/drawingml/2006/main" prst="rect">
             <a:avLst/>
@@ -2497,7 +2967,7 @@
           <p:cNvPr id="14" name="">
             <a:extLst xmlns:a="http://schemas.openxmlformats.org/drawingml/2006/main">
               <a:ext uri="{FF2B5EF4-FFF2-40B4-BE49-F238E27FC236}">
-                <a16:creationId xmlns:a16="http://schemas.microsoft.com/office/drawing/2014/main" id="{CFA61999-B1D1-4739-B8A0-943AFB58ED3D}"/>
+                <a16:creationId xmlns:a16="http://schemas.microsoft.com/office/drawing/2014/main" id="{6C043931-9F79-471C-B339-B2B4535EA83A}"/>
               </a:ext>
             </a:extLst>
           </p:cNvPr>
@@ -2532,7 +3002,7 @@
           <p:cNvPr id="15" name="">
             <a:extLst xmlns:a="http://schemas.openxmlformats.org/drawingml/2006/main">
               <a:ext uri="{FF2B5EF4-FFF2-40B4-BE49-F238E27FC236}">
-                <a16:creationId xmlns:a16="http://schemas.microsoft.com/office/drawing/2014/main" id="{4F2764C5-63C7-441E-BDC8-63B9B81E7EFF}"/>
+                <a16:creationId xmlns:a16="http://schemas.microsoft.com/office/drawing/2014/main" id="{68ED50A4-F8AC-4151-9960-81FD053AD099}"/>
               </a:ext>
             </a:extLst>
           </p:cNvPr>
@@ -2565,7 +3035,7 @@
           <p:cNvPr id="16" name="">
             <a:extLst xmlns:a="http://schemas.openxmlformats.org/drawingml/2006/main">
               <a:ext uri="{FF2B5EF4-FFF2-40B4-BE49-F238E27FC236}">
-                <a16:creationId xmlns:a16="http://schemas.microsoft.com/office/drawing/2014/main" id="{69A0560C-05FB-4138-9020-1AAADCCA0FF9}"/>
+                <a16:creationId xmlns:a16="http://schemas.microsoft.com/office/drawing/2014/main" id="{859AD8E7-E4E4-44C6-9C16-F04F7D397230}"/>
               </a:ext>
             </a:extLst>
           </p:cNvPr>
@@ -2619,10 +3089,10 @@
           <p:nvPr/>
         </p:nvPicPr>
         <p:blipFill>
-          <a:blip xmlns:r="http://schemas.openxmlformats.org/officeDocument/2006/relationships" xmlns:a="http://schemas.openxmlformats.org/drawingml/2006/main" r:embed="R4fd13acc364a43b8">
+          <a:blip xmlns:r="http://schemas.openxmlformats.org/officeDocument/2006/relationships" xmlns:a="http://schemas.openxmlformats.org/drawingml/2006/main" r:embed="Rabdd2b0896724353">
             <a:extLst>
               <a:ext uri="{96DAC541-7B7A-43D3-8B79-37D633B846F1}">
-                <asvg:svgBlip xmlns:asvg="http://schemas.microsoft.com/office/drawing/2016/SVG/main" r:embed="R2ae9cb18418e4fab"/>
+                <asvg:svgBlip xmlns:asvg="http://schemas.microsoft.com/office/drawing/2016/SVG/main" r:embed="R2000799a97f5483f"/>
               </a:ext>
             </a:extLst>
           </a:blip>
@@ -2630,8 +3100,8 @@
         </p:blipFill>
         <p:spPr>
           <a:xfrm xmlns:a="http://schemas.openxmlformats.org/drawingml/2006/main">
-            <a:off x="857250" y="3695700"/>
-            <a:ext cx="4267200" cy="1219200"/>
+            <a:off x="1208681" y="3849805"/>
+            <a:ext cx="3564338" cy="834790"/>
           </a:xfrm>
           <a:prstGeom xmlns:a="http://schemas.openxmlformats.org/drawingml/2006/main" prst="rect">
             <a:avLst/>
@@ -2643,7 +3113,7 @@
           <p:cNvPr id="18" name="">
             <a:extLst xmlns:a="http://schemas.openxmlformats.org/drawingml/2006/main">
               <a:ext uri="{FF2B5EF4-FFF2-40B4-BE49-F238E27FC236}">
-                <a16:creationId xmlns:a16="http://schemas.microsoft.com/office/drawing/2014/main" id="{24CE11C7-0483-47FE-905C-068456E5B278}"/>
+                <a16:creationId xmlns:a16="http://schemas.microsoft.com/office/drawing/2014/main" id="{7248FB54-E0C0-4207-9AAA-A8B0002A95C8}"/>
               </a:ext>
             </a:extLst>
           </p:cNvPr>
@@ -2678,7 +3148,7 @@
           <p:cNvPr id="19" name="">
             <a:extLst xmlns:a="http://schemas.openxmlformats.org/drawingml/2006/main">
               <a:ext uri="{FF2B5EF4-FFF2-40B4-BE49-F238E27FC236}">
-                <a16:creationId xmlns:a16="http://schemas.microsoft.com/office/drawing/2014/main" id="{0252076C-CC10-4DBC-B0AF-DD21C407A29C}"/>
+                <a16:creationId xmlns:a16="http://schemas.microsoft.com/office/drawing/2014/main" id="{91EA623F-FFA1-44C4-8773-42F247E205F9}"/>
               </a:ext>
             </a:extLst>
           </p:cNvPr>
@@ -2711,7 +3181,7 @@
           <p:cNvPr id="20" name="">
             <a:extLst xmlns:a="http://schemas.openxmlformats.org/drawingml/2006/main">
               <a:ext uri="{FF2B5EF4-FFF2-40B4-BE49-F238E27FC236}">
-                <a16:creationId xmlns:a16="http://schemas.microsoft.com/office/drawing/2014/main" id="{BE51B47D-9477-4E51-890A-D1F3323405BC}"/>
+                <a16:creationId xmlns:a16="http://schemas.microsoft.com/office/drawing/2014/main" id="{9FB79325-BFB2-4FBF-A98D-A2D457EA539C}"/>
               </a:ext>
             </a:extLst>
           </p:cNvPr>
@@ -2765,10 +3235,10 @@
           <p:nvPr/>
         </p:nvPicPr>
         <p:blipFill>
-          <a:blip xmlns:r="http://schemas.openxmlformats.org/officeDocument/2006/relationships" xmlns:a="http://schemas.openxmlformats.org/drawingml/2006/main" r:embed="Rb6bbc01d3d1d4ae3">
+          <a:blip xmlns:r="http://schemas.openxmlformats.org/officeDocument/2006/relationships" xmlns:a="http://schemas.openxmlformats.org/drawingml/2006/main" r:embed="Rd2dbb76b27ec423d">
             <a:extLst>
               <a:ext uri="{96DAC541-7B7A-43D3-8B79-37D633B846F1}">
-                <asvg:svgBlip xmlns:asvg="http://schemas.microsoft.com/office/drawing/2016/SVG/main" r:embed="Rd5c7726e4aa64701"/>
+                <asvg:svgBlip xmlns:asvg="http://schemas.microsoft.com/office/drawing/2016/SVG/main" r:embed="R39ba60b611f44402"/>
               </a:ext>
             </a:extLst>
           </a:blip>
@@ -2776,8 +3246,8 @@
         </p:blipFill>
         <p:spPr>
           <a:xfrm xmlns:a="http://schemas.openxmlformats.org/drawingml/2006/main">
-            <a:off x="6000750" y="2076450"/>
-            <a:ext cx="5334000" cy="933450"/>
+            <a:off x="7077129" y="2090242"/>
+            <a:ext cx="3181242" cy="829667"/>
           </a:xfrm>
           <a:prstGeom xmlns:a="http://schemas.openxmlformats.org/drawingml/2006/main" prst="rect">
             <a:avLst/>
@@ -2789,7 +3259,7 @@
           <p:cNvPr id="22" name="">
             <a:extLst xmlns:a="http://schemas.openxmlformats.org/drawingml/2006/main">
               <a:ext uri="{FF2B5EF4-FFF2-40B4-BE49-F238E27FC236}">
-                <a16:creationId xmlns:a16="http://schemas.microsoft.com/office/drawing/2014/main" id="{5E4069F9-917D-4442-8F6D-189E15039567}"/>
+                <a16:creationId xmlns:a16="http://schemas.microsoft.com/office/drawing/2014/main" id="{CF7E3558-44EA-435C-88F9-AF9E567175B2}"/>
               </a:ext>
             </a:extLst>
           </p:cNvPr>
@@ -2824,7 +3294,7 @@
           <p:cNvPr id="23" name="">
             <a:extLst xmlns:a="http://schemas.openxmlformats.org/drawingml/2006/main">
               <a:ext uri="{FF2B5EF4-FFF2-40B4-BE49-F238E27FC236}">
-                <a16:creationId xmlns:a16="http://schemas.microsoft.com/office/drawing/2014/main" id="{3483F3AB-14C3-458D-B8F3-FC51EC1A1F6E}"/>
+                <a16:creationId xmlns:a16="http://schemas.microsoft.com/office/drawing/2014/main" id="{71F78F78-84BB-426D-9CC7-4689E0D1FA86}"/>
               </a:ext>
             </a:extLst>
           </p:cNvPr>
@@ -2857,7 +3327,7 @@
           <p:cNvPr id="24" name="">
             <a:extLst xmlns:a="http://schemas.openxmlformats.org/drawingml/2006/main">
               <a:ext uri="{FF2B5EF4-FFF2-40B4-BE49-F238E27FC236}">
-                <a16:creationId xmlns:a16="http://schemas.microsoft.com/office/drawing/2014/main" id="{86F099DF-070A-444F-A5CB-480A3D89CE29}"/>
+                <a16:creationId xmlns:a16="http://schemas.microsoft.com/office/drawing/2014/main" id="{0ABBDE26-342F-4351-952C-4C6C91CFBEFB}"/>
               </a:ext>
             </a:extLst>
           </p:cNvPr>
@@ -2907,7 +3377,7 @@
           <p:cNvPr id="25" name="">
             <a:extLst xmlns:a="http://schemas.openxmlformats.org/drawingml/2006/main">
               <a:ext uri="{FF2B5EF4-FFF2-40B4-BE49-F238E27FC236}">
-                <a16:creationId xmlns:a16="http://schemas.microsoft.com/office/drawing/2014/main" id="{1DB1C9CD-3D32-4DE9-9419-01488D6FB0F2}"/>
+                <a16:creationId xmlns:a16="http://schemas.microsoft.com/office/drawing/2014/main" id="{7EC364F7-145A-444B-A925-C75527231617}"/>
               </a:ext>
             </a:extLst>
           </p:cNvPr>
@@ -2991,7 +3461,7 @@
           <p:cNvPr id="26" name="">
             <a:extLst xmlns:a="http://schemas.openxmlformats.org/drawingml/2006/main">
               <a:ext uri="{FF2B5EF4-FFF2-40B4-BE49-F238E27FC236}">
-                <a16:creationId xmlns:a16="http://schemas.microsoft.com/office/drawing/2014/main" id="{7EE385E0-03BB-4DE4-B687-661E2C51B53F}"/>
+                <a16:creationId xmlns:a16="http://schemas.microsoft.com/office/drawing/2014/main" id="{09C3A0CC-A724-4852-A7BA-72F0E7744DD4}"/>
               </a:ext>
             </a:extLst>
           </p:cNvPr>
@@ -3039,7 +3509,7 @@
     </p:spTree>
     <p:extLst>
       <p:ext uri="{BB962C8B-B14F-4D97-AF65-F5344CB8AC3E}">
-        <p14:creationId xmlns:p14="http://schemas.microsoft.com/office/powerpoint/2010/main" val="2090478160"/>
+        <p14:creationId xmlns:p14="http://schemas.microsoft.com/office/powerpoint/2010/main" val="1756205844"/>
       </p:ext>
     </p:extLst>
   </p:cSld>
@@ -3067,7 +3537,7 @@
           <p:nvPr/>
         </p:nvPicPr>
         <p:blipFill>
-          <a:blip xmlns:r="http://schemas.openxmlformats.org/officeDocument/2006/relationships" xmlns:a="http://schemas.openxmlformats.org/drawingml/2006/main" r:embed="Rfef83da68f4c4475"/>
+          <a:blip xmlns:r="http://schemas.openxmlformats.org/officeDocument/2006/relationships" xmlns:a="http://schemas.openxmlformats.org/drawingml/2006/main" r:embed="R1510f906889345e1"/>
           <a:srcRect xmlns:a="http://schemas.openxmlformats.org/drawingml/2006/main" l="0" t="0" r="0" b="0"/>
           <a:stretch xmlns:a="http://schemas.openxmlformats.org/drawingml/2006/main">
             <a:fillRect l="0" t="0" r="0" b="0"/>
@@ -3088,7 +3558,7 @@
           <p:cNvPr id="2" name="">
             <a:extLst xmlns:a="http://schemas.openxmlformats.org/drawingml/2006/main">
               <a:ext uri="{FF2B5EF4-FFF2-40B4-BE49-F238E27FC236}">
-                <a16:creationId xmlns:a16="http://schemas.microsoft.com/office/drawing/2014/main" id="{E9C78735-A5AB-4301-A5E8-5CD1FB8B32A2}"/>
+                <a16:creationId xmlns:a16="http://schemas.microsoft.com/office/drawing/2014/main" id="{9B3A6EF1-6FA2-4A04-BCCC-F5DA8C942C29}"/>
               </a:ext>
             </a:extLst>
           </p:cNvPr>
@@ -3121,7 +3591,7 @@
           <p:cNvPr id="3" name="">
             <a:extLst xmlns:a="http://schemas.openxmlformats.org/drawingml/2006/main">
               <a:ext uri="{FF2B5EF4-FFF2-40B4-BE49-F238E27FC236}">
-                <a16:creationId xmlns:a16="http://schemas.microsoft.com/office/drawing/2014/main" id="{E77D680F-E2AE-431F-8AFE-1E69E4929D3D}"/>
+                <a16:creationId xmlns:a16="http://schemas.microsoft.com/office/drawing/2014/main" id="{C7B8FE3D-0094-4F8A-B52F-3977ECB00B3F}"/>
               </a:ext>
             </a:extLst>
           </p:cNvPr>
@@ -3171,7 +3641,7 @@
           <p:cNvPr id="4" name="">
             <a:extLst xmlns:a="http://schemas.openxmlformats.org/drawingml/2006/main">
               <a:ext uri="{FF2B5EF4-FFF2-40B4-BE49-F238E27FC236}">
-                <a16:creationId xmlns:a16="http://schemas.microsoft.com/office/drawing/2014/main" id="{8AACD275-8B87-4F2D-82B1-7641353101F6}"/>
+                <a16:creationId xmlns:a16="http://schemas.microsoft.com/office/drawing/2014/main" id="{574A2B97-9026-4AFA-910E-5501742B1516}"/>
               </a:ext>
             </a:extLst>
           </p:cNvPr>
@@ -3204,7 +3674,7 @@
           <p:cNvPr id="5" name="">
             <a:extLst xmlns:a="http://schemas.openxmlformats.org/drawingml/2006/main">
               <a:ext uri="{FF2B5EF4-FFF2-40B4-BE49-F238E27FC236}">
-                <a16:creationId xmlns:a16="http://schemas.microsoft.com/office/drawing/2014/main" id="{90AC5519-AB21-4D40-8066-234180B26416}"/>
+                <a16:creationId xmlns:a16="http://schemas.microsoft.com/office/drawing/2014/main" id="{90B07371-4B22-4C02-A692-08E6D13B0A43}"/>
               </a:ext>
             </a:extLst>
           </p:cNvPr>
@@ -3252,7 +3722,7 @@
     </p:spTree>
     <p:extLst>
       <p:ext uri="{BB962C8B-B14F-4D97-AF65-F5344CB8AC3E}">
-        <p14:creationId xmlns:p14="http://schemas.microsoft.com/office/powerpoint/2010/main" val="62055793"/>
+        <p14:creationId xmlns:p14="http://schemas.microsoft.com/office/powerpoint/2010/main" val="750689179"/>
       </p:ext>
     </p:extLst>
   </p:cSld>
@@ -3280,7 +3750,7 @@
           <p:nvPr/>
         </p:nvPicPr>
         <p:blipFill>
-          <a:blip xmlns:r="http://schemas.openxmlformats.org/officeDocument/2006/relationships" xmlns:a="http://schemas.openxmlformats.org/drawingml/2006/main" r:embed="Rbac6ed38e56c433b"/>
+          <a:blip xmlns:r="http://schemas.openxmlformats.org/officeDocument/2006/relationships" xmlns:a="http://schemas.openxmlformats.org/drawingml/2006/main" r:embed="R52322e3bbdad4ab3"/>
           <a:srcRect xmlns:a="http://schemas.openxmlformats.org/drawingml/2006/main" l="0" t="0" r="0" b="0"/>
           <a:stretch xmlns:a="http://schemas.openxmlformats.org/drawingml/2006/main">
             <a:fillRect l="0" t="0" r="0" b="0"/>
@@ -3301,7 +3771,7 @@
           <p:cNvPr id="2" name="">
             <a:extLst xmlns:a="http://schemas.openxmlformats.org/drawingml/2006/main">
               <a:ext uri="{FF2B5EF4-FFF2-40B4-BE49-F238E27FC236}">
-                <a16:creationId xmlns:a16="http://schemas.microsoft.com/office/drawing/2014/main" id="{5C02F8E4-ADC6-47E2-BFBC-F69012D569A8}"/>
+                <a16:creationId xmlns:a16="http://schemas.microsoft.com/office/drawing/2014/main" id="{205022BA-9941-4F85-831D-B33DCE0C925F}"/>
               </a:ext>
             </a:extLst>
           </p:cNvPr>
@@ -3334,7 +3804,7 @@
           <p:cNvPr id="3" name="">
             <a:extLst xmlns:a="http://schemas.openxmlformats.org/drawingml/2006/main">
               <a:ext uri="{FF2B5EF4-FFF2-40B4-BE49-F238E27FC236}">
-                <a16:creationId xmlns:a16="http://schemas.microsoft.com/office/drawing/2014/main" id="{B29E7869-0C51-4C64-A246-A12D960A7F00}"/>
+                <a16:creationId xmlns:a16="http://schemas.microsoft.com/office/drawing/2014/main" id="{B7192A81-60C2-4378-99E4-85C3853A860F}"/>
               </a:ext>
             </a:extLst>
           </p:cNvPr>
@@ -3384,7 +3854,7 @@
           <p:cNvPr id="4" name="">
             <a:extLst xmlns:a="http://schemas.openxmlformats.org/drawingml/2006/main">
               <a:ext uri="{FF2B5EF4-FFF2-40B4-BE49-F238E27FC236}">
-                <a16:creationId xmlns:a16="http://schemas.microsoft.com/office/drawing/2014/main" id="{8F8287F8-FEA1-4B70-839C-C1A1CB01E05B}"/>
+                <a16:creationId xmlns:a16="http://schemas.microsoft.com/office/drawing/2014/main" id="{9AA3C150-19BC-40D5-8125-8783C4F91598}"/>
               </a:ext>
             </a:extLst>
           </p:cNvPr>
@@ -3417,7 +3887,7 @@
           <p:cNvPr id="5" name="">
             <a:extLst xmlns:a="http://schemas.openxmlformats.org/drawingml/2006/main">
               <a:ext uri="{FF2B5EF4-FFF2-40B4-BE49-F238E27FC236}">
-                <a16:creationId xmlns:a16="http://schemas.microsoft.com/office/drawing/2014/main" id="{2A9031AB-978C-4604-8B3C-F4F6EC2DA234}"/>
+                <a16:creationId xmlns:a16="http://schemas.microsoft.com/office/drawing/2014/main" id="{F9D00DA2-63E9-497E-9C56-EAE3B8AEC222}"/>
               </a:ext>
             </a:extLst>
           </p:cNvPr>
@@ -3465,7 +3935,7 @@
     </p:spTree>
     <p:extLst>
       <p:ext uri="{BB962C8B-B14F-4D97-AF65-F5344CB8AC3E}">
-        <p14:creationId xmlns:p14="http://schemas.microsoft.com/office/powerpoint/2010/main" val="1500301899"/>
+        <p14:creationId xmlns:p14="http://schemas.microsoft.com/office/powerpoint/2010/main" val="611189440"/>
       </p:ext>
     </p:extLst>
   </p:cSld>
@@ -3475,6 +3945,13 @@
 <file path=ppt/slides/slide6.xml><?xml version="1.0" encoding="utf-8"?>
 <p:sld xmlns:p="http://schemas.openxmlformats.org/presentationml/2006/main">
   <p:cSld>
+    <p:bg>
+      <p:bgPr>
+        <a:solidFill xmlns:a="http://schemas.openxmlformats.org/drawingml/2006/main">
+          <a:srgbClr val="EEF3F5"/>
+        </a:solidFill>
+      </p:bgPr>
+    </p:bg>
     <p:spTree>
       <p:nvGrpSpPr>
         <p:cNvPr id="1" name=""/>
@@ -3484,25 +3961,238 @@
       <p:grpSpPr>
         <a:xfrm xmlns:a="http://schemas.openxmlformats.org/drawingml/2006/main"/>
       </p:grpSpPr>
+      <p:sp>
+        <p:nvSpPr>
+          <p:cNvPr id="25" name="">
+            <a:extLst xmlns:a="http://schemas.openxmlformats.org/drawingml/2006/main">
+              <a:ext uri="{FF2B5EF4-FFF2-40B4-BE49-F238E27FC236}">
+                <a16:creationId xmlns:a16="http://schemas.microsoft.com/office/drawing/2014/main" id="{6406700F-F61E-4A87-AFAF-14CF530888AD}"/>
+              </a:ext>
+            </a:extLst>
+          </p:cNvPr>
+          <p:cNvSpPr>
+            <a:spLocks xmlns:a="http://schemas.openxmlformats.org/drawingml/2006/main" noGrp="1"/>
+          </p:cNvSpPr>
+          <p:nvPr/>
+        </p:nvSpPr>
+        <p:spPr>
+          <a:xfrm xmlns:a="http://schemas.openxmlformats.org/drawingml/2006/main">
+            <a:off x="0" y="0"/>
+            <a:ext cx="12192000" cy="95250"/>
+          </a:xfrm>
+          <a:prstGeom xmlns:a="http://schemas.openxmlformats.org/drawingml/2006/main" prst="rect">
+            <a:avLst/>
+          </a:prstGeom>
+          <a:solidFill xmlns:a="http://schemas.openxmlformats.org/drawingml/2006/main">
+            <a:srgbClr val="001B3A"/>
+          </a:solidFill>
+          <a:ln xmlns:a="http://schemas.openxmlformats.org/drawingml/2006/main" w="0">
+            <a:solidFill>
+              <a:srgbClr val="001B3A"/>
+            </a:solidFill>
+            <a:prstDash val="solid"/>
+          </a:ln>
+        </p:spPr>
+      </p:sp>
+      <p:sp>
+        <p:nvSpPr>
+          <p:cNvPr id="2" name="">
+            <a:extLst xmlns:a="http://schemas.openxmlformats.org/drawingml/2006/main">
+              <a:ext uri="{FF2B5EF4-FFF2-40B4-BE49-F238E27FC236}">
+                <a16:creationId xmlns:a16="http://schemas.microsoft.com/office/drawing/2014/main" id="{7E15ABEB-EA41-4AB8-B175-967DBFBC9A85}"/>
+              </a:ext>
+            </a:extLst>
+          </p:cNvPr>
+          <p:cNvSpPr>
+            <a:spLocks xmlns:a="http://schemas.openxmlformats.org/drawingml/2006/main" noGrp="1"/>
+          </p:cNvSpPr>
+          <p:nvPr/>
+        </p:nvSpPr>
+        <p:spPr>
+          <a:xfrm xmlns:a="http://schemas.openxmlformats.org/drawingml/2006/main">
+            <a:off x="0" y="95250"/>
+            <a:ext cx="12192000" cy="47625"/>
+          </a:xfrm>
+          <a:prstGeom xmlns:a="http://schemas.openxmlformats.org/drawingml/2006/main" prst="rect">
+            <a:avLst/>
+          </a:prstGeom>
+          <a:solidFill xmlns:a="http://schemas.openxmlformats.org/drawingml/2006/main">
+            <a:srgbClr val="008C95"/>
+          </a:solidFill>
+          <a:ln xmlns:a="http://schemas.openxmlformats.org/drawingml/2006/main" w="0">
+            <a:solidFill>
+              <a:srgbClr val="008C95"/>
+            </a:solidFill>
+            <a:prstDash val="solid"/>
+          </a:ln>
+        </p:spPr>
+      </p:sp>
+      <p:sp>
+        <p:nvSpPr>
+          <p:cNvPr id="3" name="">
+            <a:extLst xmlns:a="http://schemas.openxmlformats.org/drawingml/2006/main">
+              <a:ext uri="{FF2B5EF4-FFF2-40B4-BE49-F238E27FC236}">
+                <a16:creationId xmlns:a16="http://schemas.microsoft.com/office/drawing/2014/main" id="{B57E417E-152F-4873-86AA-60EACDD1D673}"/>
+              </a:ext>
+            </a:extLst>
+          </p:cNvPr>
+          <p:cNvSpPr>
+            <a:spLocks xmlns:a="http://schemas.openxmlformats.org/drawingml/2006/main" noGrp="1"/>
+          </p:cNvSpPr>
+          <p:nvPr/>
+        </p:nvSpPr>
+        <p:spPr>
+          <a:xfrm xmlns:a="http://schemas.openxmlformats.org/drawingml/2006/main">
+            <a:off x="514350" y="295275"/>
+            <a:ext cx="3143250" cy="209550"/>
+          </a:xfrm>
+          <a:prstGeom xmlns:a="http://schemas.openxmlformats.org/drawingml/2006/main" prst="rect">
+            <a:avLst/>
+          </a:prstGeom>
+          <a:noFill xmlns:a="http://schemas.openxmlformats.org/drawingml/2006/main"/>
+          <a:ln xmlns:a="http://schemas.openxmlformats.org/drawingml/2006/main" w="0">
+            <a:noFill/>
+            <a:prstDash val="solid"/>
+          </a:ln>
+        </p:spPr>
+        <p:txBody>
+          <a:bodyPr xmlns:a="http://schemas.openxmlformats.org/drawingml/2006/main"/>
+          <a:lstStyle xmlns:a="http://schemas.openxmlformats.org/drawingml/2006/main"/>
+          <a:p xmlns:a="http://schemas.openxmlformats.org/drawingml/2006/main">
+            <a:pPr>
+              <a:defRPr sz="900" b="1">
+                <a:solidFill>
+                  <a:srgbClr val="008C95"/>
+                </a:solidFill>
+              </a:defRPr>
+            </a:pPr>
+            <a:r>
+              <a:rPr sz="900" b="1">
+                <a:solidFill>
+                  <a:srgbClr val="008C95"/>
+                </a:solidFill>
+              </a:rPr>
+              <a:t>THRESHOLDING / 06</a:t>
+            </a:r>
+          </a:p>
+        </p:txBody>
+      </p:sp>
+      <p:sp>
+        <p:nvSpPr>
+          <p:cNvPr id="4" name="">
+            <a:extLst xmlns:a="http://schemas.openxmlformats.org/drawingml/2006/main">
+              <a:ext uri="{FF2B5EF4-FFF2-40B4-BE49-F238E27FC236}">
+                <a16:creationId xmlns:a16="http://schemas.microsoft.com/office/drawing/2014/main" id="{290530FA-F65E-450B-9488-920A505A0451}"/>
+              </a:ext>
+            </a:extLst>
+          </p:cNvPr>
+          <p:cNvSpPr>
+            <a:spLocks xmlns:a="http://schemas.openxmlformats.org/drawingml/2006/main" noGrp="1"/>
+          </p:cNvSpPr>
+          <p:nvPr/>
+        </p:nvSpPr>
+        <p:spPr>
+          <a:xfrm xmlns:a="http://schemas.openxmlformats.org/drawingml/2006/main">
+            <a:off x="514350" y="542925"/>
+            <a:ext cx="4000500" cy="171450"/>
+          </a:xfrm>
+          <a:prstGeom xmlns:a="http://schemas.openxmlformats.org/drawingml/2006/main" prst="rect">
+            <a:avLst/>
+          </a:prstGeom>
+          <a:noFill xmlns:a="http://schemas.openxmlformats.org/drawingml/2006/main"/>
+          <a:ln xmlns:a="http://schemas.openxmlformats.org/drawingml/2006/main" w="0">
+            <a:noFill/>
+            <a:prstDash val="solid"/>
+          </a:ln>
+        </p:spPr>
+        <p:txBody>
+          <a:bodyPr xmlns:a="http://schemas.openxmlformats.org/drawingml/2006/main"/>
+          <a:lstStyle xmlns:a="http://schemas.openxmlformats.org/drawingml/2006/main"/>
+          <a:p xmlns:a="http://schemas.openxmlformats.org/drawingml/2006/main">
+            <a:pPr>
+              <a:defRPr sz="750" b="1">
+                <a:solidFill>
+                  <a:srgbClr val="C9A227"/>
+                </a:solidFill>
+              </a:defRPr>
+            </a:pPr>
+            <a:r>
+              <a:rPr sz="750" b="1">
+                <a:solidFill>
+                  <a:srgbClr val="C9A227"/>
+                </a:solidFill>
+              </a:rPr>
+              <a:t>MISSION CODE</a:t>
+            </a:r>
+          </a:p>
+        </p:txBody>
+      </p:sp>
+      <p:sp>
+        <p:nvSpPr>
+          <p:cNvPr id="5" name="">
+            <a:extLst xmlns:a="http://schemas.openxmlformats.org/drawingml/2006/main">
+              <a:ext uri="{FF2B5EF4-FFF2-40B4-BE49-F238E27FC236}">
+                <a16:creationId xmlns:a16="http://schemas.microsoft.com/office/drawing/2014/main" id="{C0658D8C-DCEC-413B-9518-0F2797464687}"/>
+              </a:ext>
+            </a:extLst>
+          </p:cNvPr>
+          <p:cNvSpPr>
+            <a:spLocks xmlns:a="http://schemas.openxmlformats.org/drawingml/2006/main" noGrp="1"/>
+          </p:cNvSpPr>
+          <p:nvPr/>
+        </p:nvSpPr>
+        <p:spPr>
+          <a:xfrm xmlns:a="http://schemas.openxmlformats.org/drawingml/2006/main">
+            <a:off x="514350" y="762000"/>
+            <a:ext cx="10048875" cy="476250"/>
+          </a:xfrm>
+          <a:prstGeom xmlns:a="http://schemas.openxmlformats.org/drawingml/2006/main" prst="rect">
+            <a:avLst/>
+          </a:prstGeom>
+          <a:noFill xmlns:a="http://schemas.openxmlformats.org/drawingml/2006/main"/>
+          <a:ln xmlns:a="http://schemas.openxmlformats.org/drawingml/2006/main" w="0">
+            <a:noFill/>
+            <a:prstDash val="solid"/>
+          </a:ln>
+        </p:spPr>
+        <p:txBody>
+          <a:bodyPr xmlns:a="http://schemas.openxmlformats.org/drawingml/2006/main"/>
+          <a:lstStyle xmlns:a="http://schemas.openxmlformats.org/drawingml/2006/main"/>
+          <a:p xmlns:a="http://schemas.openxmlformats.org/drawingml/2006/main">
+            <a:pPr>
+              <a:defRPr sz="2700" b="1">
+                <a:solidFill>
+                  <a:srgbClr val="001B3A"/>
+                </a:solidFill>
+              </a:defRPr>
+            </a:pPr>
+            <a:r>
+              <a:rPr sz="2700" b="1">
+                <a:solidFill>
+                  <a:srgbClr val="001B3A"/>
+                </a:solidFill>
+              </a:rPr>
+              <a:t>Require two consistent scans—then land safely</a:t>
+            </a:r>
+          </a:p>
+        </p:txBody>
+      </p:sp>
       <p:pic>
         <p:nvPicPr>
-          <p:cNvPr id="6" name=""/>
+          <p:cNvPr id="30" name=""/>
           <p:cNvPicPr>
             <a:picLocks xmlns:a="http://schemas.openxmlformats.org/drawingml/2006/main" noChangeAspect="1"/>
           </p:cNvPicPr>
           <p:nvPr/>
         </p:nvPicPr>
         <p:blipFill>
-          <a:blip xmlns:r="http://schemas.openxmlformats.org/officeDocument/2006/relationships" xmlns:a="http://schemas.openxmlformats.org/drawingml/2006/main" r:embed="R26ab564b80cc464f"/>
-          <a:srcRect xmlns:a="http://schemas.openxmlformats.org/drawingml/2006/main" l="0" t="0" r="0" b="0"/>
-          <a:stretch xmlns:a="http://schemas.openxmlformats.org/drawingml/2006/main">
-            <a:fillRect l="0" t="0" r="0" b="0"/>
-          </a:stretch>
+          <a:blip xmlns:r="http://schemas.openxmlformats.org/officeDocument/2006/relationships" xmlns:a="http://schemas.openxmlformats.org/drawingml/2006/main" r:embed="R59e0850cc6354ad9"/>
+          <a:stretch xmlns:a="http://schemas.openxmlformats.org/drawingml/2006/main"/>
         </p:blipFill>
         <p:spPr>
           <a:xfrm xmlns:a="http://schemas.openxmlformats.org/drawingml/2006/main">
-            <a:off x="0" y="0"/>
-            <a:ext cx="12192000" cy="6858000"/>
+            <a:off x="11258550" y="399746"/>
+            <a:ext cx="457200" cy="229209"/>
           </a:xfrm>
           <a:prstGeom xmlns:a="http://schemas.openxmlformats.org/drawingml/2006/main" prst="rect">
             <a:avLst/>
@@ -3511,32 +4201,32 @@
       </p:pic>
       <p:sp>
         <p:nvSpPr>
-          <p:cNvPr id="2" name="">
-            <a:extLst xmlns:a="http://schemas.openxmlformats.org/drawingml/2006/main">
-              <a:ext uri="{FF2B5EF4-FFF2-40B4-BE49-F238E27FC236}">
-                <a16:creationId xmlns:a16="http://schemas.microsoft.com/office/drawing/2014/main" id="{2A3A9B34-B6EA-41BE-B357-BE964EEE765B}"/>
-              </a:ext>
-            </a:extLst>
-          </p:cNvPr>
-          <p:cNvSpPr>
-            <a:spLocks xmlns:a="http://schemas.openxmlformats.org/drawingml/2006/main" noGrp="1"/>
-          </p:cNvSpPr>
-          <p:nvPr/>
-        </p:nvSpPr>
-        <p:spPr>
-          <a:xfrm xmlns:a="http://schemas.openxmlformats.org/drawingml/2006/main">
-            <a:off x="323850" y="257175"/>
-            <a:ext cx="2667000" cy="247650"/>
+          <p:cNvPr id="7" name="">
+            <a:extLst xmlns:a="http://schemas.openxmlformats.org/drawingml/2006/main">
+              <a:ext uri="{FF2B5EF4-FFF2-40B4-BE49-F238E27FC236}">
+                <a16:creationId xmlns:a16="http://schemas.microsoft.com/office/drawing/2014/main" id="{C5111BA6-40FE-4B1F-82A8-A4FB4038AA4D}"/>
+              </a:ext>
+            </a:extLst>
+          </p:cNvPr>
+          <p:cNvSpPr>
+            <a:spLocks xmlns:a="http://schemas.openxmlformats.org/drawingml/2006/main" noGrp="1"/>
+          </p:cNvSpPr>
+          <p:nvPr/>
+        </p:nvSpPr>
+        <p:spPr>
+          <a:xfrm xmlns:a="http://schemas.openxmlformats.org/drawingml/2006/main">
+            <a:off x="514350" y="6505575"/>
+            <a:ext cx="11163300" cy="9525"/>
           </a:xfrm>
           <a:prstGeom xmlns:a="http://schemas.openxmlformats.org/drawingml/2006/main" prst="rect">
             <a:avLst/>
           </a:prstGeom>
           <a:solidFill xmlns:a="http://schemas.openxmlformats.org/drawingml/2006/main">
-            <a:srgbClr val="EEF3F5"/>
+            <a:srgbClr val="B8C7CF"/>
           </a:solidFill>
           <a:ln xmlns:a="http://schemas.openxmlformats.org/drawingml/2006/main" w="0">
             <a:solidFill>
-              <a:srgbClr val="EEF3F5"/>
+              <a:srgbClr val="B8C7CF"/>
             </a:solidFill>
             <a:prstDash val="solid"/>
           </a:ln>
@@ -3544,22 +4234,22 @@
       </p:sp>
       <p:sp>
         <p:nvSpPr>
-          <p:cNvPr id="3" name="">
-            <a:extLst xmlns:a="http://schemas.openxmlformats.org/drawingml/2006/main">
-              <a:ext uri="{FF2B5EF4-FFF2-40B4-BE49-F238E27FC236}">
-                <a16:creationId xmlns:a16="http://schemas.microsoft.com/office/drawing/2014/main" id="{73796FD6-98BB-424E-AEA0-149CA98E5D52}"/>
-              </a:ext>
-            </a:extLst>
-          </p:cNvPr>
-          <p:cNvSpPr>
-            <a:spLocks xmlns:a="http://schemas.openxmlformats.org/drawingml/2006/main" noGrp="1"/>
-          </p:cNvSpPr>
-          <p:nvPr/>
-        </p:nvSpPr>
-        <p:spPr>
-          <a:xfrm xmlns:a="http://schemas.openxmlformats.org/drawingml/2006/main">
-            <a:off x="381000" y="323850"/>
-            <a:ext cx="2476500" cy="171450"/>
+          <p:cNvPr id="8" name="">
+            <a:extLst xmlns:a="http://schemas.openxmlformats.org/drawingml/2006/main">
+              <a:ext uri="{FF2B5EF4-FFF2-40B4-BE49-F238E27FC236}">
+                <a16:creationId xmlns:a16="http://schemas.microsoft.com/office/drawing/2014/main" id="{4524ED43-6AFD-4144-BAF3-BB57014A7A88}"/>
+              </a:ext>
+            </a:extLst>
+          </p:cNvPr>
+          <p:cNvSpPr>
+            <a:spLocks xmlns:a="http://schemas.openxmlformats.org/drawingml/2006/main" noGrp="1"/>
+          </p:cNvSpPr>
+          <p:nvPr/>
+        </p:nvSpPr>
+        <p:spPr>
+          <a:xfrm xmlns:a="http://schemas.openxmlformats.org/drawingml/2006/main">
+            <a:off x="514350" y="6572250"/>
+            <a:ext cx="4286250" cy="142875"/>
           </a:xfrm>
           <a:prstGeom xmlns:a="http://schemas.openxmlformats.org/drawingml/2006/main" prst="rect">
             <a:avLst/>
@@ -3575,51 +4265,136 @@
           <a:lstStyle xmlns:a="http://schemas.openxmlformats.org/drawingml/2006/main"/>
           <a:p xmlns:a="http://schemas.openxmlformats.org/drawingml/2006/main">
             <a:pPr>
-              <a:defRPr sz="750" b="1">
-                <a:solidFill>
-                  <a:srgbClr val="008C95"/>
+              <a:defRPr sz="675">
+                <a:solidFill>
+                  <a:srgbClr val="536A7B"/>
                 </a:solidFill>
               </a:defRPr>
             </a:pPr>
             <a:r>
-              <a:rPr sz="750" b="1">
-                <a:solidFill>
-                  <a:srgbClr val="008C95"/>
-                </a:solidFill>
-              </a:rPr>
-              <a:t>THRESHOLDING / 06</a:t>
+              <a:rPr sz="675">
+                <a:solidFill>
+                  <a:srgbClr val="536A7B"/>
+                </a:solidFill>
+              </a:rPr>
+              <a:t>WRC | HOPPER STUDIO | INFORMATION SERIES</a:t>
             </a:r>
           </a:p>
         </p:txBody>
       </p:sp>
       <p:sp>
         <p:nvSpPr>
-          <p:cNvPr id="4" name="">
-            <a:extLst xmlns:a="http://schemas.openxmlformats.org/drawingml/2006/main">
-              <a:ext uri="{FF2B5EF4-FFF2-40B4-BE49-F238E27FC236}">
-                <a16:creationId xmlns:a16="http://schemas.microsoft.com/office/drawing/2014/main" id="{EF843398-9196-4B89-ADBC-94D8C69CAE67}"/>
-              </a:ext>
-            </a:extLst>
-          </p:cNvPr>
-          <p:cNvSpPr>
-            <a:spLocks xmlns:a="http://schemas.openxmlformats.org/drawingml/2006/main" noGrp="1"/>
-          </p:cNvSpPr>
-          <p:nvPr/>
-        </p:nvSpPr>
-        <p:spPr>
-          <a:xfrm xmlns:a="http://schemas.openxmlformats.org/drawingml/2006/main">
-            <a:off x="10820400" y="6496050"/>
-            <a:ext cx="914400" cy="238125"/>
-          </a:xfrm>
-          <a:prstGeom xmlns:a="http://schemas.openxmlformats.org/drawingml/2006/main" prst="rect">
-            <a:avLst/>
+          <p:cNvPr id="9" name="">
+            <a:extLst xmlns:a="http://schemas.openxmlformats.org/drawingml/2006/main">
+              <a:ext uri="{FF2B5EF4-FFF2-40B4-BE49-F238E27FC236}">
+                <a16:creationId xmlns:a16="http://schemas.microsoft.com/office/drawing/2014/main" id="{EFA856AC-909C-4F6E-94EC-E52F19CFB840}"/>
+              </a:ext>
+            </a:extLst>
+          </p:cNvPr>
+          <p:cNvSpPr>
+            <a:spLocks xmlns:a="http://schemas.openxmlformats.org/drawingml/2006/main" noGrp="1"/>
+          </p:cNvSpPr>
+          <p:nvPr/>
+        </p:nvSpPr>
+        <p:spPr>
+          <a:xfrm xmlns:a="http://schemas.openxmlformats.org/drawingml/2006/main">
+            <a:off x="10953750" y="6572250"/>
+            <a:ext cx="723900" cy="142875"/>
+          </a:xfrm>
+          <a:prstGeom xmlns:a="http://schemas.openxmlformats.org/drawingml/2006/main" prst="rect">
+            <a:avLst/>
+          </a:prstGeom>
+          <a:noFill xmlns:a="http://schemas.openxmlformats.org/drawingml/2006/main"/>
+          <a:ln xmlns:a="http://schemas.openxmlformats.org/drawingml/2006/main" w="0">
+            <a:noFill/>
+            <a:prstDash val="solid"/>
+          </a:ln>
+        </p:spPr>
+        <p:txBody>
+          <a:bodyPr xmlns:a="http://schemas.openxmlformats.org/drawingml/2006/main"/>
+          <a:lstStyle xmlns:a="http://schemas.openxmlformats.org/drawingml/2006/main"/>
+          <a:p xmlns:a="http://schemas.openxmlformats.org/drawingml/2006/main">
+            <a:pPr algn="r">
+              <a:defRPr sz="675">
+                <a:solidFill>
+                  <a:srgbClr val="536A7B"/>
+                </a:solidFill>
+              </a:defRPr>
+            </a:pPr>
+            <a:r>
+              <a:rPr sz="675">
+                <a:solidFill>
+                  <a:srgbClr val="536A7B"/>
+                </a:solidFill>
+              </a:rPr>
+              <a:t>6 / 7</a:t>
+            </a:r>
+          </a:p>
+        </p:txBody>
+      </p:sp>
+      <p:sp>
+        <p:nvSpPr>
+          <p:cNvPr id="10" name="">
+            <a:extLst xmlns:a="http://schemas.openxmlformats.org/drawingml/2006/main">
+              <a:ext uri="{FF2B5EF4-FFF2-40B4-BE49-F238E27FC236}">
+                <a16:creationId xmlns:a16="http://schemas.microsoft.com/office/drawing/2014/main" id="{21F70632-384F-487D-8301-0559F03C603E}"/>
+              </a:ext>
+            </a:extLst>
+          </p:cNvPr>
+          <p:cNvSpPr>
+            <a:spLocks xmlns:a="http://schemas.openxmlformats.org/drawingml/2006/main" noGrp="1"/>
+          </p:cNvSpPr>
+          <p:nvPr/>
+        </p:nvSpPr>
+        <p:spPr>
+          <a:xfrm xmlns:a="http://schemas.openxmlformats.org/drawingml/2006/main">
+            <a:off x="514350" y="1409700"/>
+            <a:ext cx="6838950" cy="4838700"/>
+          </a:xfrm>
+          <a:prstGeom xmlns:a="http://schemas.openxmlformats.org/drawingml/2006/main" prst="roundRect">
+            <a:avLst>
+              <a:gd name="adj" fmla="val 2362"/>
+            </a:avLst>
           </a:prstGeom>
           <a:solidFill xmlns:a="http://schemas.openxmlformats.org/drawingml/2006/main">
-            <a:srgbClr val="EEF3F5"/>
+            <a:srgbClr val="062B4D"/>
+          </a:solidFill>
+          <a:ln xmlns:a="http://schemas.openxmlformats.org/drawingml/2006/main" w="14288">
+            <a:solidFill>
+              <a:srgbClr val="0C365A"/>
+            </a:solidFill>
+            <a:prstDash val="solid"/>
+          </a:ln>
+        </p:spPr>
+      </p:sp>
+      <p:sp>
+        <p:nvSpPr>
+          <p:cNvPr id="11" name="">
+            <a:extLst xmlns:a="http://schemas.openxmlformats.org/drawingml/2006/main">
+              <a:ext uri="{FF2B5EF4-FFF2-40B4-BE49-F238E27FC236}">
+                <a16:creationId xmlns:a16="http://schemas.microsoft.com/office/drawing/2014/main" id="{BB335156-22D0-43D8-BEE2-C4CF974895A5}"/>
+              </a:ext>
+            </a:extLst>
+          </p:cNvPr>
+          <p:cNvSpPr>
+            <a:spLocks xmlns:a="http://schemas.openxmlformats.org/drawingml/2006/main" noGrp="1"/>
+          </p:cNvSpPr>
+          <p:nvPr/>
+        </p:nvSpPr>
+        <p:spPr>
+          <a:xfrm xmlns:a="http://schemas.openxmlformats.org/drawingml/2006/main">
+            <a:off x="514350" y="1409700"/>
+            <a:ext cx="6838950" cy="342900"/>
+          </a:xfrm>
+          <a:prstGeom xmlns:a="http://schemas.openxmlformats.org/drawingml/2006/main" prst="rect">
+            <a:avLst/>
+          </a:prstGeom>
+          <a:solidFill xmlns:a="http://schemas.openxmlformats.org/drawingml/2006/main">
+            <a:srgbClr val="071A30"/>
           </a:solidFill>
           <a:ln xmlns:a="http://schemas.openxmlformats.org/drawingml/2006/main" w="0">
             <a:solidFill>
-              <a:srgbClr val="EEF3F5"/>
+              <a:srgbClr val="071A30"/>
             </a:solidFill>
             <a:prstDash val="solid"/>
           </a:ln>
@@ -3627,22 +4402,121 @@
       </p:sp>
       <p:sp>
         <p:nvSpPr>
-          <p:cNvPr id="5" name="">
-            <a:extLst xmlns:a="http://schemas.openxmlformats.org/drawingml/2006/main">
-              <a:ext uri="{FF2B5EF4-FFF2-40B4-BE49-F238E27FC236}">
-                <a16:creationId xmlns:a16="http://schemas.microsoft.com/office/drawing/2014/main" id="{05477CE6-7E77-4952-B7DC-7169F469111D}"/>
-              </a:ext>
-            </a:extLst>
-          </p:cNvPr>
-          <p:cNvSpPr>
-            <a:spLocks xmlns:a="http://schemas.openxmlformats.org/drawingml/2006/main" noGrp="1"/>
-          </p:cNvSpPr>
-          <p:nvPr/>
-        </p:nvSpPr>
-        <p:spPr>
-          <a:xfrm xmlns:a="http://schemas.openxmlformats.org/drawingml/2006/main">
-            <a:off x="10934700" y="6572250"/>
-            <a:ext cx="666750" cy="133350"/>
+          <p:cNvPr id="12" name="">
+            <a:extLst xmlns:a="http://schemas.openxmlformats.org/drawingml/2006/main">
+              <a:ext uri="{FF2B5EF4-FFF2-40B4-BE49-F238E27FC236}">
+                <a16:creationId xmlns:a16="http://schemas.microsoft.com/office/drawing/2014/main" id="{00AF301E-EBE8-4738-B668-2E1419168C21}"/>
+              </a:ext>
+            </a:extLst>
+          </p:cNvPr>
+          <p:cNvSpPr>
+            <a:spLocks xmlns:a="http://schemas.openxmlformats.org/drawingml/2006/main" noGrp="1"/>
+          </p:cNvSpPr>
+          <p:nvPr/>
+        </p:nvSpPr>
+        <p:spPr>
+          <a:xfrm xmlns:a="http://schemas.openxmlformats.org/drawingml/2006/main">
+            <a:off x="666750" y="1533525"/>
+            <a:ext cx="85725" cy="85725"/>
+          </a:xfrm>
+          <a:prstGeom xmlns:a="http://schemas.openxmlformats.org/drawingml/2006/main" prst="ellipse">
+            <a:avLst/>
+          </a:prstGeom>
+          <a:solidFill xmlns:a="http://schemas.openxmlformats.org/drawingml/2006/main">
+            <a:srgbClr val="F16B72"/>
+          </a:solidFill>
+          <a:ln xmlns:a="http://schemas.openxmlformats.org/drawingml/2006/main" w="0">
+            <a:solidFill>
+              <a:srgbClr val="F16B72"/>
+            </a:solidFill>
+            <a:prstDash val="solid"/>
+          </a:ln>
+        </p:spPr>
+      </p:sp>
+      <p:sp>
+        <p:nvSpPr>
+          <p:cNvPr id="13" name="">
+            <a:extLst xmlns:a="http://schemas.openxmlformats.org/drawingml/2006/main">
+              <a:ext uri="{FF2B5EF4-FFF2-40B4-BE49-F238E27FC236}">
+                <a16:creationId xmlns:a16="http://schemas.microsoft.com/office/drawing/2014/main" id="{47AC99CD-E40A-4E8F-B455-F6FA3B65B74F}"/>
+              </a:ext>
+            </a:extLst>
+          </p:cNvPr>
+          <p:cNvSpPr>
+            <a:spLocks xmlns:a="http://schemas.openxmlformats.org/drawingml/2006/main" noGrp="1"/>
+          </p:cNvSpPr>
+          <p:nvPr/>
+        </p:nvSpPr>
+        <p:spPr>
+          <a:xfrm xmlns:a="http://schemas.openxmlformats.org/drawingml/2006/main">
+            <a:off x="838200" y="1533525"/>
+            <a:ext cx="85725" cy="85725"/>
+          </a:xfrm>
+          <a:prstGeom xmlns:a="http://schemas.openxmlformats.org/drawingml/2006/main" prst="ellipse">
+            <a:avLst/>
+          </a:prstGeom>
+          <a:solidFill xmlns:a="http://schemas.openxmlformats.org/drawingml/2006/main">
+            <a:srgbClr val="EABF48"/>
+          </a:solidFill>
+          <a:ln xmlns:a="http://schemas.openxmlformats.org/drawingml/2006/main" w="0">
+            <a:solidFill>
+              <a:srgbClr val="EABF48"/>
+            </a:solidFill>
+            <a:prstDash val="solid"/>
+          </a:ln>
+        </p:spPr>
+      </p:sp>
+      <p:sp>
+        <p:nvSpPr>
+          <p:cNvPr id="14" name="">
+            <a:extLst xmlns:a="http://schemas.openxmlformats.org/drawingml/2006/main">
+              <a:ext uri="{FF2B5EF4-FFF2-40B4-BE49-F238E27FC236}">
+                <a16:creationId xmlns:a16="http://schemas.microsoft.com/office/drawing/2014/main" id="{699F7D5C-86D3-4CF0-9F9A-7D50C5A4EFDB}"/>
+              </a:ext>
+            </a:extLst>
+          </p:cNvPr>
+          <p:cNvSpPr>
+            <a:spLocks xmlns:a="http://schemas.openxmlformats.org/drawingml/2006/main" noGrp="1"/>
+          </p:cNvSpPr>
+          <p:nvPr/>
+        </p:nvSpPr>
+        <p:spPr>
+          <a:xfrm xmlns:a="http://schemas.openxmlformats.org/drawingml/2006/main">
+            <a:off x="1009650" y="1533525"/>
+            <a:ext cx="85725" cy="85725"/>
+          </a:xfrm>
+          <a:prstGeom xmlns:a="http://schemas.openxmlformats.org/drawingml/2006/main" prst="ellipse">
+            <a:avLst/>
+          </a:prstGeom>
+          <a:solidFill xmlns:a="http://schemas.openxmlformats.org/drawingml/2006/main">
+            <a:srgbClr val="4CC2A8"/>
+          </a:solidFill>
+          <a:ln xmlns:a="http://schemas.openxmlformats.org/drawingml/2006/main" w="0">
+            <a:solidFill>
+              <a:srgbClr val="4CC2A8"/>
+            </a:solidFill>
+            <a:prstDash val="solid"/>
+          </a:ln>
+        </p:spPr>
+      </p:sp>
+      <p:sp>
+        <p:nvSpPr>
+          <p:cNvPr id="15" name="">
+            <a:extLst xmlns:a="http://schemas.openxmlformats.org/drawingml/2006/main">
+              <a:ext uri="{FF2B5EF4-FFF2-40B4-BE49-F238E27FC236}">
+                <a16:creationId xmlns:a16="http://schemas.microsoft.com/office/drawing/2014/main" id="{051DAE16-50DB-4FF3-879F-1C703675C1F4}"/>
+              </a:ext>
+            </a:extLst>
+          </p:cNvPr>
+          <p:cNvSpPr>
+            <a:spLocks xmlns:a="http://schemas.openxmlformats.org/drawingml/2006/main" noGrp="1"/>
+          </p:cNvSpPr>
+          <p:nvPr/>
+        </p:nvSpPr>
+        <p:spPr>
+          <a:xfrm xmlns:a="http://schemas.openxmlformats.org/drawingml/2006/main">
+            <a:off x="1257300" y="1495425"/>
+            <a:ext cx="5924550" cy="190500"/>
           </a:xfrm>
           <a:prstGeom xmlns:a="http://schemas.openxmlformats.org/drawingml/2006/main" prst="rect">
             <a:avLst/>
@@ -3657,20 +4531,2054 @@
           <a:bodyPr xmlns:a="http://schemas.openxmlformats.org/drawingml/2006/main"/>
           <a:lstStyle xmlns:a="http://schemas.openxmlformats.org/drawingml/2006/main"/>
           <a:p xmlns:a="http://schemas.openxmlformats.org/drawingml/2006/main">
-            <a:pPr algn="r">
-              <a:defRPr sz="675">
-                <a:solidFill>
-                  <a:srgbClr val="536A7B"/>
+            <a:pPr>
+              <a:defRPr sz="825" b="1">
+                <a:solidFill>
+                  <a:srgbClr val="A7C2CF"/>
                 </a:solidFill>
               </a:defRPr>
             </a:pPr>
             <a:r>
-              <a:rPr sz="675">
-                <a:solidFill>
-                  <a:srgbClr val="536A7B"/>
-                </a:solidFill>
-              </a:rPr>
-              <a:t>6 / 7</a:t>
+              <a:rPr sz="825" b="1">
+                <a:solidFill>
+                  <a:srgbClr val="A7C2CF"/>
+                </a:solidFill>
+              </a:rPr>
+              <a:t>BOUNDED TWO-HIT CHECK · PROGRAM.JS</a:t>
+            </a:r>
+          </a:p>
+        </p:txBody>
+      </p:sp>
+      <p:sp>
+        <p:nvSpPr>
+          <p:cNvPr id="16" name="">
+            <a:extLst xmlns:a="http://schemas.openxmlformats.org/drawingml/2006/main">
+              <a:ext uri="{FF2B5EF4-FFF2-40B4-BE49-F238E27FC236}">
+                <a16:creationId xmlns:a16="http://schemas.microsoft.com/office/drawing/2014/main" id="{E6FB8179-C5EE-4433-8400-563AB030F82A}"/>
+              </a:ext>
+            </a:extLst>
+          </p:cNvPr>
+          <p:cNvSpPr>
+            <a:spLocks xmlns:a="http://schemas.openxmlformats.org/drawingml/2006/main" noGrp="1"/>
+          </p:cNvSpPr>
+          <p:nvPr/>
+        </p:nvSpPr>
+        <p:spPr>
+          <a:xfrm xmlns:a="http://schemas.openxmlformats.org/drawingml/2006/main">
+            <a:off x="685800" y="1885950"/>
+            <a:ext cx="6496050" cy="4229100"/>
+          </a:xfrm>
+          <a:prstGeom xmlns:a="http://schemas.openxmlformats.org/drawingml/2006/main" prst="rect">
+            <a:avLst/>
+          </a:prstGeom>
+          <a:noFill xmlns:a="http://schemas.openxmlformats.org/drawingml/2006/main"/>
+          <a:ln xmlns:a="http://schemas.openxmlformats.org/drawingml/2006/main" w="0">
+            <a:noFill/>
+            <a:prstDash val="solid"/>
+          </a:ln>
+        </p:spPr>
+        <p:txBody>
+          <a:bodyPr xmlns:a="http://schemas.openxmlformats.org/drawingml/2006/main" lIns="0" tIns="0" rIns="0" bIns="0">
+            <a:noAutofit/>
+          </a:bodyPr>
+          <a:lstStyle xmlns:a="http://schemas.openxmlformats.org/drawingml/2006/main"/>
+          <a:p xmlns:a="http://schemas.openxmlformats.org/drawingml/2006/main">
+            <a:pPr>
+              <a:lnSpc>
+                <a:spcPct val="105000"/>
+              </a:lnSpc>
+              <a:spcAft>
+                <a:spcPts val="0"/>
+              </a:spcAft>
+              <a:buNone/>
+              <a:defRPr sz="1200"/>
+            </a:pPr>
+            <a:r>
+              <a:rPr sz="1200">
+                <a:solidFill>
+                  <a:srgbClr val="67869A"/>
+                </a:solidFill>
+                <a:latin typeface="Aptos Mono"/>
+                <a:ea typeface="Aptos Mono"/>
+                <a:cs typeface="Aptos Mono"/>
+              </a:rPr>
+              <a:t> 1  </a:t>
+            </a:r>
+            <a:r>
+              <a:rPr sz="1200">
+                <a:solidFill>
+                  <a:srgbClr val="78C7FF"/>
+                </a:solidFill>
+                <a:latin typeface="Aptos Mono"/>
+                <a:ea typeface="Aptos Mono"/>
+                <a:cs typeface="Aptos Mono"/>
+              </a:rPr>
+              <a:t>await</a:t>
+            </a:r>
+            <a:r>
+              <a:rPr sz="1200">
+                <a:solidFill>
+                  <a:srgbClr val="E7F1F5"/>
+                </a:solidFill>
+                <a:latin typeface="Aptos Mono"/>
+                <a:ea typeface="Aptos Mono"/>
+                <a:cs typeface="Aptos Mono"/>
+              </a:rPr>
+              <a:t> drone</a:t>
+            </a:r>
+            <a:r>
+              <a:rPr sz="1200">
+                <a:solidFill>
+                  <a:srgbClr val="B4C9D8"/>
+                </a:solidFill>
+                <a:latin typeface="Aptos Mono"/>
+                <a:ea typeface="Aptos Mono"/>
+                <a:cs typeface="Aptos Mono"/>
+              </a:rPr>
+              <a:t>.</a:t>
+            </a:r>
+            <a:r>
+              <a:rPr sz="1200">
+                <a:solidFill>
+                  <a:srgbClr val="55D6C2"/>
+                </a:solidFill>
+                <a:latin typeface="Aptos Mono"/>
+                <a:ea typeface="Aptos Mono"/>
+                <a:cs typeface="Aptos Mono"/>
+              </a:rPr>
+              <a:t>takeOff</a:t>
+            </a:r>
+            <a:r>
+              <a:rPr sz="1200">
+                <a:solidFill>
+                  <a:srgbClr val="E7F1F5"/>
+                </a:solidFill>
+                <a:latin typeface="Aptos Mono"/>
+                <a:ea typeface="Aptos Mono"/>
+                <a:cs typeface="Aptos Mono"/>
+              </a:rPr>
+              <a:t>();</a:t>
+            </a:r>
+          </a:p>
+          <a:p xmlns:a="http://schemas.openxmlformats.org/drawingml/2006/main">
+            <a:pPr>
+              <a:lnSpc>
+                <a:spcPct val="105000"/>
+              </a:lnSpc>
+              <a:spcAft>
+                <a:spcPts val="0"/>
+              </a:spcAft>
+              <a:buNone/>
+              <a:defRPr sz="1200"/>
+            </a:pPr>
+            <a:r>
+              <a:rPr sz="1200">
+                <a:solidFill>
+                  <a:srgbClr val="67869A"/>
+                </a:solidFill>
+                <a:latin typeface="Aptos Mono"/>
+                <a:ea typeface="Aptos Mono"/>
+                <a:cs typeface="Aptos Mono"/>
+              </a:rPr>
+              <a:t> 2  </a:t>
+            </a:r>
+            <a:r>
+              <a:rPr sz="1200">
+                <a:solidFill>
+                  <a:srgbClr val="78C7FF"/>
+                </a:solidFill>
+                <a:latin typeface="Aptos Mono"/>
+                <a:ea typeface="Aptos Mono"/>
+                <a:cs typeface="Aptos Mono"/>
+              </a:rPr>
+              <a:t>let</a:t>
+            </a:r>
+            <a:r>
+              <a:rPr sz="1200">
+                <a:solidFill>
+                  <a:srgbClr val="E7F1F5"/>
+                </a:solidFill>
+                <a:latin typeface="Aptos Mono"/>
+                <a:ea typeface="Aptos Mono"/>
+                <a:cs typeface="Aptos Mono"/>
+              </a:rPr>
+              <a:t> consecutiveHits </a:t>
+            </a:r>
+            <a:r>
+              <a:rPr sz="1200">
+                <a:solidFill>
+                  <a:srgbClr val="B4C9D8"/>
+                </a:solidFill>
+                <a:latin typeface="Aptos Mono"/>
+                <a:ea typeface="Aptos Mono"/>
+                <a:cs typeface="Aptos Mono"/>
+              </a:rPr>
+              <a:t>=</a:t>
+            </a:r>
+            <a:r>
+              <a:rPr sz="1200">
+                <a:solidFill>
+                  <a:srgbClr val="E7F1F5"/>
+                </a:solidFill>
+                <a:latin typeface="Aptos Mono"/>
+                <a:ea typeface="Aptos Mono"/>
+                <a:cs typeface="Aptos Mono"/>
+              </a:rPr>
+              <a:t> </a:t>
+            </a:r>
+            <a:r>
+              <a:rPr sz="1200">
+                <a:solidFill>
+                  <a:srgbClr val="F5C66B"/>
+                </a:solidFill>
+                <a:latin typeface="Aptos Mono"/>
+                <a:ea typeface="Aptos Mono"/>
+                <a:cs typeface="Aptos Mono"/>
+              </a:rPr>
+              <a:t>0</a:t>
+            </a:r>
+            <a:r>
+              <a:rPr sz="1200">
+                <a:solidFill>
+                  <a:srgbClr val="E7F1F5"/>
+                </a:solidFill>
+                <a:latin typeface="Aptos Mono"/>
+                <a:ea typeface="Aptos Mono"/>
+                <a:cs typeface="Aptos Mono"/>
+              </a:rPr>
+              <a:t>;</a:t>
+            </a:r>
+          </a:p>
+          <a:p xmlns:a="http://schemas.openxmlformats.org/drawingml/2006/main">
+            <a:pPr>
+              <a:lnSpc>
+                <a:spcPct val="105000"/>
+              </a:lnSpc>
+              <a:spcAft>
+                <a:spcPts val="0"/>
+              </a:spcAft>
+              <a:buNone/>
+              <a:defRPr sz="1200"/>
+            </a:pPr>
+            <a:r>
+              <a:rPr sz="1200">
+                <a:solidFill>
+                  <a:srgbClr val="67869A"/>
+                </a:solidFill>
+                <a:latin typeface="Aptos Mono"/>
+                <a:ea typeface="Aptos Mono"/>
+                <a:cs typeface="Aptos Mono"/>
+              </a:rPr>
+              <a:t> 3  </a:t>
+            </a:r>
+          </a:p>
+          <a:p xmlns:a="http://schemas.openxmlformats.org/drawingml/2006/main">
+            <a:pPr>
+              <a:lnSpc>
+                <a:spcPct val="105000"/>
+              </a:lnSpc>
+              <a:spcAft>
+                <a:spcPts val="0"/>
+              </a:spcAft>
+              <a:buNone/>
+              <a:defRPr sz="1200"/>
+            </a:pPr>
+            <a:r>
+              <a:rPr sz="1200">
+                <a:solidFill>
+                  <a:srgbClr val="67869A"/>
+                </a:solidFill>
+                <a:latin typeface="Aptos Mono"/>
+                <a:ea typeface="Aptos Mono"/>
+                <a:cs typeface="Aptos Mono"/>
+              </a:rPr>
+              <a:t> 4  </a:t>
+            </a:r>
+            <a:r>
+              <a:rPr sz="1200">
+                <a:solidFill>
+                  <a:srgbClr val="78C7FF"/>
+                </a:solidFill>
+                <a:latin typeface="Aptos Mono"/>
+                <a:ea typeface="Aptos Mono"/>
+                <a:cs typeface="Aptos Mono"/>
+              </a:rPr>
+              <a:t>try</a:t>
+            </a:r>
+            <a:r>
+              <a:rPr sz="1200">
+                <a:solidFill>
+                  <a:srgbClr val="E7F1F5"/>
+                </a:solidFill>
+                <a:latin typeface="Aptos Mono"/>
+                <a:ea typeface="Aptos Mono"/>
+                <a:cs typeface="Aptos Mono"/>
+              </a:rPr>
+              <a:t> {</a:t>
+            </a:r>
+          </a:p>
+          <a:p xmlns:a="http://schemas.openxmlformats.org/drawingml/2006/main">
+            <a:pPr>
+              <a:lnSpc>
+                <a:spcPct val="105000"/>
+              </a:lnSpc>
+              <a:spcAft>
+                <a:spcPts val="0"/>
+              </a:spcAft>
+              <a:buNone/>
+              <a:defRPr sz="1200"/>
+            </a:pPr>
+            <a:r>
+              <a:rPr sz="1200">
+                <a:solidFill>
+                  <a:srgbClr val="67869A"/>
+                </a:solidFill>
+                <a:latin typeface="Aptos Mono"/>
+                <a:ea typeface="Aptos Mono"/>
+                <a:cs typeface="Aptos Mono"/>
+              </a:rPr>
+              <a:t> 5  </a:t>
+            </a:r>
+            <a:r>
+              <a:rPr sz="1200">
+                <a:solidFill>
+                  <a:srgbClr val="E7F1F5"/>
+                </a:solidFill>
+                <a:latin typeface="Aptos Mono"/>
+                <a:ea typeface="Aptos Mono"/>
+                <a:cs typeface="Aptos Mono"/>
+              </a:rPr>
+              <a:t>  </a:t>
+            </a:r>
+            <a:r>
+              <a:rPr sz="1200">
+                <a:solidFill>
+                  <a:srgbClr val="78C7FF"/>
+                </a:solidFill>
+                <a:latin typeface="Aptos Mono"/>
+                <a:ea typeface="Aptos Mono"/>
+                <a:cs typeface="Aptos Mono"/>
+              </a:rPr>
+              <a:t>for</a:t>
+            </a:r>
+            <a:r>
+              <a:rPr sz="1200">
+                <a:solidFill>
+                  <a:srgbClr val="E7F1F5"/>
+                </a:solidFill>
+                <a:latin typeface="Aptos Mono"/>
+                <a:ea typeface="Aptos Mono"/>
+                <a:cs typeface="Aptos Mono"/>
+              </a:rPr>
+              <a:t> (</a:t>
+            </a:r>
+            <a:r>
+              <a:rPr sz="1200">
+                <a:solidFill>
+                  <a:srgbClr val="78C7FF"/>
+                </a:solidFill>
+                <a:latin typeface="Aptos Mono"/>
+                <a:ea typeface="Aptos Mono"/>
+                <a:cs typeface="Aptos Mono"/>
+              </a:rPr>
+              <a:t>let</a:t>
+            </a:r>
+            <a:r>
+              <a:rPr sz="1200">
+                <a:solidFill>
+                  <a:srgbClr val="E7F1F5"/>
+                </a:solidFill>
+                <a:latin typeface="Aptos Mono"/>
+                <a:ea typeface="Aptos Mono"/>
+                <a:cs typeface="Aptos Mono"/>
+              </a:rPr>
+              <a:t> attempt </a:t>
+            </a:r>
+            <a:r>
+              <a:rPr sz="1200">
+                <a:solidFill>
+                  <a:srgbClr val="B4C9D8"/>
+                </a:solidFill>
+                <a:latin typeface="Aptos Mono"/>
+                <a:ea typeface="Aptos Mono"/>
+                <a:cs typeface="Aptos Mono"/>
+              </a:rPr>
+              <a:t>=</a:t>
+            </a:r>
+            <a:r>
+              <a:rPr sz="1200">
+                <a:solidFill>
+                  <a:srgbClr val="E7F1F5"/>
+                </a:solidFill>
+                <a:latin typeface="Aptos Mono"/>
+                <a:ea typeface="Aptos Mono"/>
+                <a:cs typeface="Aptos Mono"/>
+              </a:rPr>
+              <a:t> </a:t>
+            </a:r>
+            <a:r>
+              <a:rPr sz="1200">
+                <a:solidFill>
+                  <a:srgbClr val="F5C66B"/>
+                </a:solidFill>
+                <a:latin typeface="Aptos Mono"/>
+                <a:ea typeface="Aptos Mono"/>
+                <a:cs typeface="Aptos Mono"/>
+              </a:rPr>
+              <a:t>0</a:t>
+            </a:r>
+            <a:r>
+              <a:rPr sz="1200">
+                <a:solidFill>
+                  <a:srgbClr val="E7F1F5"/>
+                </a:solidFill>
+                <a:latin typeface="Aptos Mono"/>
+                <a:ea typeface="Aptos Mono"/>
+                <a:cs typeface="Aptos Mono"/>
+              </a:rPr>
+              <a:t>; attempt </a:t>
+            </a:r>
+            <a:r>
+              <a:rPr sz="1200">
+                <a:solidFill>
+                  <a:srgbClr val="B4C9D8"/>
+                </a:solidFill>
+                <a:latin typeface="Aptos Mono"/>
+                <a:ea typeface="Aptos Mono"/>
+                <a:cs typeface="Aptos Mono"/>
+              </a:rPr>
+              <a:t>&lt;</a:t>
+            </a:r>
+            <a:r>
+              <a:rPr sz="1200">
+                <a:solidFill>
+                  <a:srgbClr val="E7F1F5"/>
+                </a:solidFill>
+                <a:latin typeface="Aptos Mono"/>
+                <a:ea typeface="Aptos Mono"/>
+                <a:cs typeface="Aptos Mono"/>
+              </a:rPr>
+              <a:t> </a:t>
+            </a:r>
+            <a:r>
+              <a:rPr sz="1200">
+                <a:solidFill>
+                  <a:srgbClr val="F5C66B"/>
+                </a:solidFill>
+                <a:latin typeface="Aptos Mono"/>
+                <a:ea typeface="Aptos Mono"/>
+                <a:cs typeface="Aptos Mono"/>
+              </a:rPr>
+              <a:t>8</a:t>
+            </a:r>
+            <a:r>
+              <a:rPr sz="1200">
+                <a:solidFill>
+                  <a:srgbClr val="E7F1F5"/>
+                </a:solidFill>
+                <a:latin typeface="Aptos Mono"/>
+                <a:ea typeface="Aptos Mono"/>
+                <a:cs typeface="Aptos Mono"/>
+              </a:rPr>
+              <a:t>; attempt </a:t>
+            </a:r>
+            <a:r>
+              <a:rPr sz="1200">
+                <a:solidFill>
+                  <a:srgbClr val="B4C9D8"/>
+                </a:solidFill>
+                <a:latin typeface="Aptos Mono"/>
+                <a:ea typeface="Aptos Mono"/>
+                <a:cs typeface="Aptos Mono"/>
+              </a:rPr>
+              <a:t>+=</a:t>
+            </a:r>
+            <a:r>
+              <a:rPr sz="1200">
+                <a:solidFill>
+                  <a:srgbClr val="E7F1F5"/>
+                </a:solidFill>
+                <a:latin typeface="Aptos Mono"/>
+                <a:ea typeface="Aptos Mono"/>
+                <a:cs typeface="Aptos Mono"/>
+              </a:rPr>
+              <a:t> </a:t>
+            </a:r>
+            <a:r>
+              <a:rPr sz="1200">
+                <a:solidFill>
+                  <a:srgbClr val="F5C66B"/>
+                </a:solidFill>
+                <a:latin typeface="Aptos Mono"/>
+                <a:ea typeface="Aptos Mono"/>
+                <a:cs typeface="Aptos Mono"/>
+              </a:rPr>
+              <a:t>1</a:t>
+            </a:r>
+            <a:r>
+              <a:rPr sz="1200">
+                <a:solidFill>
+                  <a:srgbClr val="E7F1F5"/>
+                </a:solidFill>
+                <a:latin typeface="Aptos Mono"/>
+                <a:ea typeface="Aptos Mono"/>
+                <a:cs typeface="Aptos Mono"/>
+              </a:rPr>
+              <a:t>) {</a:t>
+            </a:r>
+          </a:p>
+          <a:p xmlns:a="http://schemas.openxmlformats.org/drawingml/2006/main">
+            <a:pPr>
+              <a:lnSpc>
+                <a:spcPct val="105000"/>
+              </a:lnSpc>
+              <a:spcAft>
+                <a:spcPts val="0"/>
+              </a:spcAft>
+              <a:buNone/>
+              <a:defRPr sz="1200"/>
+            </a:pPr>
+            <a:r>
+              <a:rPr sz="1200">
+                <a:solidFill>
+                  <a:srgbClr val="67869A"/>
+                </a:solidFill>
+                <a:latin typeface="Aptos Mono"/>
+                <a:ea typeface="Aptos Mono"/>
+                <a:cs typeface="Aptos Mono"/>
+              </a:rPr>
+              <a:t> 6  </a:t>
+            </a:r>
+            <a:r>
+              <a:rPr sz="1200">
+                <a:solidFill>
+                  <a:srgbClr val="E7F1F5"/>
+                </a:solidFill>
+                <a:latin typeface="Aptos Mono"/>
+                <a:ea typeface="Aptos Mono"/>
+                <a:cs typeface="Aptos Mono"/>
+              </a:rPr>
+              <a:t>    </a:t>
+            </a:r>
+            <a:r>
+              <a:rPr sz="1200">
+                <a:solidFill>
+                  <a:srgbClr val="78C7FF"/>
+                </a:solidFill>
+                <a:latin typeface="Aptos Mono"/>
+                <a:ea typeface="Aptos Mono"/>
+                <a:cs typeface="Aptos Mono"/>
+              </a:rPr>
+              <a:t>const</a:t>
+            </a:r>
+            <a:r>
+              <a:rPr sz="1200">
+                <a:solidFill>
+                  <a:srgbClr val="E7F1F5"/>
+                </a:solidFill>
+                <a:latin typeface="Aptos Mono"/>
+                <a:ea typeface="Aptos Mono"/>
+                <a:cs typeface="Aptos Mono"/>
+              </a:rPr>
+              <a:t> seen </a:t>
+            </a:r>
+            <a:r>
+              <a:rPr sz="1200">
+                <a:solidFill>
+                  <a:srgbClr val="B4C9D8"/>
+                </a:solidFill>
+                <a:latin typeface="Aptos Mono"/>
+                <a:ea typeface="Aptos Mono"/>
+                <a:cs typeface="Aptos Mono"/>
+              </a:rPr>
+              <a:t>=</a:t>
+            </a:r>
+            <a:r>
+              <a:rPr sz="1200">
+                <a:solidFill>
+                  <a:srgbClr val="E7F1F5"/>
+                </a:solidFill>
+                <a:latin typeface="Aptos Mono"/>
+                <a:ea typeface="Aptos Mono"/>
+                <a:cs typeface="Aptos Mono"/>
+              </a:rPr>
+              <a:t> </a:t>
+            </a:r>
+            <a:r>
+              <a:rPr sz="1200">
+                <a:solidFill>
+                  <a:srgbClr val="78C7FF"/>
+                </a:solidFill>
+                <a:latin typeface="Aptos Mono"/>
+                <a:ea typeface="Aptos Mono"/>
+                <a:cs typeface="Aptos Mono"/>
+              </a:rPr>
+              <a:t>await</a:t>
+            </a:r>
+            <a:r>
+              <a:rPr sz="1200">
+                <a:solidFill>
+                  <a:srgbClr val="E7F1F5"/>
+                </a:solidFill>
+                <a:latin typeface="Aptos Mono"/>
+                <a:ea typeface="Aptos Mono"/>
+                <a:cs typeface="Aptos Mono"/>
+              </a:rPr>
+              <a:t> vision</a:t>
+            </a:r>
+            <a:r>
+              <a:rPr sz="1200">
+                <a:solidFill>
+                  <a:srgbClr val="B4C9D8"/>
+                </a:solidFill>
+                <a:latin typeface="Aptos Mono"/>
+                <a:ea typeface="Aptos Mono"/>
+                <a:cs typeface="Aptos Mono"/>
+              </a:rPr>
+              <a:t>.</a:t>
+            </a:r>
+            <a:r>
+              <a:rPr sz="1200">
+                <a:solidFill>
+                  <a:srgbClr val="55D6C2"/>
+                </a:solidFill>
+                <a:latin typeface="Aptos Mono"/>
+                <a:ea typeface="Aptos Mono"/>
+                <a:cs typeface="Aptos Mono"/>
+              </a:rPr>
+              <a:t>seesBinary</a:t>
+            </a:r>
+            <a:r>
+              <a:rPr sz="1200">
+                <a:solidFill>
+                  <a:srgbClr val="E7F1F5"/>
+                </a:solidFill>
+                <a:latin typeface="Aptos Mono"/>
+                <a:ea typeface="Aptos Mono"/>
+                <a:cs typeface="Aptos Mono"/>
+              </a:rPr>
+              <a:t>(</a:t>
+            </a:r>
+            <a:r>
+              <a:rPr sz="1200">
+                <a:solidFill>
+                  <a:srgbClr val="A8E6A1"/>
+                </a:solidFill>
+                <a:latin typeface="Aptos Mono"/>
+                <a:ea typeface="Aptos Mono"/>
+                <a:cs typeface="Aptos Mono"/>
+              </a:rPr>
+              <a:t>"white"</a:t>
+            </a:r>
+            <a:r>
+              <a:rPr sz="1200">
+                <a:solidFill>
+                  <a:srgbClr val="E7F1F5"/>
+                </a:solidFill>
+                <a:latin typeface="Aptos Mono"/>
+                <a:ea typeface="Aptos Mono"/>
+                <a:cs typeface="Aptos Mono"/>
+              </a:rPr>
+              <a:t>, </a:t>
+            </a:r>
+            <a:r>
+              <a:rPr sz="1200">
+                <a:solidFill>
+                  <a:srgbClr val="F5C66B"/>
+                </a:solidFill>
+                <a:latin typeface="Aptos Mono"/>
+                <a:ea typeface="Aptos Mono"/>
+                <a:cs typeface="Aptos Mono"/>
+              </a:rPr>
+              <a:t>60</a:t>
+            </a:r>
+            <a:r>
+              <a:rPr sz="1200">
+                <a:solidFill>
+                  <a:srgbClr val="E7F1F5"/>
+                </a:solidFill>
+                <a:latin typeface="Aptos Mono"/>
+                <a:ea typeface="Aptos Mono"/>
+                <a:cs typeface="Aptos Mono"/>
+              </a:rPr>
+              <a:t>, </a:t>
+            </a:r>
+            <a:r>
+              <a:rPr sz="1200">
+                <a:solidFill>
+                  <a:srgbClr val="D7A6FF"/>
+                </a:solidFill>
+                <a:latin typeface="Aptos Mono"/>
+                <a:ea typeface="Aptos Mono"/>
+                <a:cs typeface="Aptos Mono"/>
+              </a:rPr>
+              <a:t>false</a:t>
+            </a:r>
+            <a:r>
+              <a:rPr sz="1200">
+                <a:solidFill>
+                  <a:srgbClr val="E7F1F5"/>
+                </a:solidFill>
+                <a:latin typeface="Aptos Mono"/>
+                <a:ea typeface="Aptos Mono"/>
+                <a:cs typeface="Aptos Mono"/>
+              </a:rPr>
+              <a:t>, </a:t>
+            </a:r>
+            <a:r>
+              <a:rPr sz="1200">
+                <a:solidFill>
+                  <a:srgbClr val="F5C66B"/>
+                </a:solidFill>
+                <a:latin typeface="Aptos Mono"/>
+                <a:ea typeface="Aptos Mono"/>
+                <a:cs typeface="Aptos Mono"/>
+              </a:rPr>
+              <a:t>18</a:t>
+            </a:r>
+            <a:r>
+              <a:rPr sz="1200">
+                <a:solidFill>
+                  <a:srgbClr val="E7F1F5"/>
+                </a:solidFill>
+                <a:latin typeface="Aptos Mono"/>
+                <a:ea typeface="Aptos Mono"/>
+                <a:cs typeface="Aptos Mono"/>
+              </a:rPr>
+              <a:t>);</a:t>
+            </a:r>
+          </a:p>
+          <a:p xmlns:a="http://schemas.openxmlformats.org/drawingml/2006/main">
+            <a:pPr>
+              <a:lnSpc>
+                <a:spcPct val="105000"/>
+              </a:lnSpc>
+              <a:spcAft>
+                <a:spcPts val="0"/>
+              </a:spcAft>
+              <a:buNone/>
+              <a:defRPr sz="1200"/>
+            </a:pPr>
+            <a:r>
+              <a:rPr sz="1200">
+                <a:solidFill>
+                  <a:srgbClr val="67869A"/>
+                </a:solidFill>
+                <a:latin typeface="Aptos Mono"/>
+                <a:ea typeface="Aptos Mono"/>
+                <a:cs typeface="Aptos Mono"/>
+              </a:rPr>
+              <a:t> 7  </a:t>
+            </a:r>
+            <a:r>
+              <a:rPr sz="1200">
+                <a:solidFill>
+                  <a:srgbClr val="E7F1F5"/>
+                </a:solidFill>
+                <a:latin typeface="Aptos Mono"/>
+                <a:ea typeface="Aptos Mono"/>
+                <a:cs typeface="Aptos Mono"/>
+              </a:rPr>
+              <a:t>    consecutiveHits </a:t>
+            </a:r>
+            <a:r>
+              <a:rPr sz="1200">
+                <a:solidFill>
+                  <a:srgbClr val="B4C9D8"/>
+                </a:solidFill>
+                <a:latin typeface="Aptos Mono"/>
+                <a:ea typeface="Aptos Mono"/>
+                <a:cs typeface="Aptos Mono"/>
+              </a:rPr>
+              <a:t>=</a:t>
+            </a:r>
+            <a:r>
+              <a:rPr sz="1200">
+                <a:solidFill>
+                  <a:srgbClr val="E7F1F5"/>
+                </a:solidFill>
+                <a:latin typeface="Aptos Mono"/>
+                <a:ea typeface="Aptos Mono"/>
+                <a:cs typeface="Aptos Mono"/>
+              </a:rPr>
+              <a:t> seen </a:t>
+            </a:r>
+            <a:r>
+              <a:rPr sz="1200">
+                <a:solidFill>
+                  <a:srgbClr val="B4C9D8"/>
+                </a:solidFill>
+                <a:latin typeface="Aptos Mono"/>
+                <a:ea typeface="Aptos Mono"/>
+                <a:cs typeface="Aptos Mono"/>
+              </a:rPr>
+              <a:t>?</a:t>
+            </a:r>
+            <a:r>
+              <a:rPr sz="1200">
+                <a:solidFill>
+                  <a:srgbClr val="E7F1F5"/>
+                </a:solidFill>
+                <a:latin typeface="Aptos Mono"/>
+                <a:ea typeface="Aptos Mono"/>
+                <a:cs typeface="Aptos Mono"/>
+              </a:rPr>
+              <a:t> consecutiveHits </a:t>
+            </a:r>
+            <a:r>
+              <a:rPr sz="1200">
+                <a:solidFill>
+                  <a:srgbClr val="B4C9D8"/>
+                </a:solidFill>
+                <a:latin typeface="Aptos Mono"/>
+                <a:ea typeface="Aptos Mono"/>
+                <a:cs typeface="Aptos Mono"/>
+              </a:rPr>
+              <a:t>+</a:t>
+            </a:r>
+            <a:r>
+              <a:rPr sz="1200">
+                <a:solidFill>
+                  <a:srgbClr val="E7F1F5"/>
+                </a:solidFill>
+                <a:latin typeface="Aptos Mono"/>
+                <a:ea typeface="Aptos Mono"/>
+                <a:cs typeface="Aptos Mono"/>
+              </a:rPr>
+              <a:t> </a:t>
+            </a:r>
+            <a:r>
+              <a:rPr sz="1200">
+                <a:solidFill>
+                  <a:srgbClr val="F5C66B"/>
+                </a:solidFill>
+                <a:latin typeface="Aptos Mono"/>
+                <a:ea typeface="Aptos Mono"/>
+                <a:cs typeface="Aptos Mono"/>
+              </a:rPr>
+              <a:t>1</a:t>
+            </a:r>
+            <a:r>
+              <a:rPr sz="1200">
+                <a:solidFill>
+                  <a:srgbClr val="E7F1F5"/>
+                </a:solidFill>
+                <a:latin typeface="Aptos Mono"/>
+                <a:ea typeface="Aptos Mono"/>
+                <a:cs typeface="Aptos Mono"/>
+              </a:rPr>
+              <a:t> </a:t>
+            </a:r>
+            <a:r>
+              <a:rPr sz="1200">
+                <a:solidFill>
+                  <a:srgbClr val="B4C9D8"/>
+                </a:solidFill>
+                <a:latin typeface="Aptos Mono"/>
+                <a:ea typeface="Aptos Mono"/>
+                <a:cs typeface="Aptos Mono"/>
+              </a:rPr>
+              <a:t>:</a:t>
+            </a:r>
+            <a:r>
+              <a:rPr sz="1200">
+                <a:solidFill>
+                  <a:srgbClr val="E7F1F5"/>
+                </a:solidFill>
+                <a:latin typeface="Aptos Mono"/>
+                <a:ea typeface="Aptos Mono"/>
+                <a:cs typeface="Aptos Mono"/>
+              </a:rPr>
+              <a:t> </a:t>
+            </a:r>
+            <a:r>
+              <a:rPr sz="1200">
+                <a:solidFill>
+                  <a:srgbClr val="F5C66B"/>
+                </a:solidFill>
+                <a:latin typeface="Aptos Mono"/>
+                <a:ea typeface="Aptos Mono"/>
+                <a:cs typeface="Aptos Mono"/>
+              </a:rPr>
+              <a:t>0</a:t>
+            </a:r>
+            <a:r>
+              <a:rPr sz="1200">
+                <a:solidFill>
+                  <a:srgbClr val="E7F1F5"/>
+                </a:solidFill>
+                <a:latin typeface="Aptos Mono"/>
+                <a:ea typeface="Aptos Mono"/>
+                <a:cs typeface="Aptos Mono"/>
+              </a:rPr>
+              <a:t>;</a:t>
+            </a:r>
+          </a:p>
+          <a:p xmlns:a="http://schemas.openxmlformats.org/drawingml/2006/main">
+            <a:pPr>
+              <a:lnSpc>
+                <a:spcPct val="105000"/>
+              </a:lnSpc>
+              <a:spcAft>
+                <a:spcPts val="0"/>
+              </a:spcAft>
+              <a:buNone/>
+              <a:defRPr sz="1200"/>
+            </a:pPr>
+            <a:r>
+              <a:rPr sz="1200">
+                <a:solidFill>
+                  <a:srgbClr val="67869A"/>
+                </a:solidFill>
+                <a:latin typeface="Aptos Mono"/>
+                <a:ea typeface="Aptos Mono"/>
+                <a:cs typeface="Aptos Mono"/>
+              </a:rPr>
+              <a:t> 8  </a:t>
+            </a:r>
+          </a:p>
+          <a:p xmlns:a="http://schemas.openxmlformats.org/drawingml/2006/main">
+            <a:pPr>
+              <a:lnSpc>
+                <a:spcPct val="105000"/>
+              </a:lnSpc>
+              <a:spcAft>
+                <a:spcPts val="0"/>
+              </a:spcAft>
+              <a:buNone/>
+              <a:defRPr sz="1200"/>
+            </a:pPr>
+            <a:r>
+              <a:rPr sz="1200">
+                <a:solidFill>
+                  <a:srgbClr val="67869A"/>
+                </a:solidFill>
+                <a:latin typeface="Aptos Mono"/>
+                <a:ea typeface="Aptos Mono"/>
+                <a:cs typeface="Aptos Mono"/>
+              </a:rPr>
+              <a:t> 9  </a:t>
+            </a:r>
+            <a:r>
+              <a:rPr sz="1200">
+                <a:solidFill>
+                  <a:srgbClr val="E7F1F5"/>
+                </a:solidFill>
+                <a:latin typeface="Aptos Mono"/>
+                <a:ea typeface="Aptos Mono"/>
+                <a:cs typeface="Aptos Mono"/>
+              </a:rPr>
+              <a:t>    </a:t>
+            </a:r>
+            <a:r>
+              <a:rPr sz="1200">
+                <a:solidFill>
+                  <a:srgbClr val="78C7FF"/>
+                </a:solidFill>
+                <a:latin typeface="Aptos Mono"/>
+                <a:ea typeface="Aptos Mono"/>
+                <a:cs typeface="Aptos Mono"/>
+              </a:rPr>
+              <a:t>if</a:t>
+            </a:r>
+            <a:r>
+              <a:rPr sz="1200">
+                <a:solidFill>
+                  <a:srgbClr val="E7F1F5"/>
+                </a:solidFill>
+                <a:latin typeface="Aptos Mono"/>
+                <a:ea typeface="Aptos Mono"/>
+                <a:cs typeface="Aptos Mono"/>
+              </a:rPr>
+              <a:t> (consecutiveHits </a:t>
+            </a:r>
+            <a:r>
+              <a:rPr sz="1200">
+                <a:solidFill>
+                  <a:srgbClr val="B4C9D8"/>
+                </a:solidFill>
+                <a:latin typeface="Aptos Mono"/>
+                <a:ea typeface="Aptos Mono"/>
+                <a:cs typeface="Aptos Mono"/>
+              </a:rPr>
+              <a:t>===</a:t>
+            </a:r>
+            <a:r>
+              <a:rPr sz="1200">
+                <a:solidFill>
+                  <a:srgbClr val="E7F1F5"/>
+                </a:solidFill>
+                <a:latin typeface="Aptos Mono"/>
+                <a:ea typeface="Aptos Mono"/>
+                <a:cs typeface="Aptos Mono"/>
+              </a:rPr>
+              <a:t> </a:t>
+            </a:r>
+            <a:r>
+              <a:rPr sz="1200">
+                <a:solidFill>
+                  <a:srgbClr val="F5C66B"/>
+                </a:solidFill>
+                <a:latin typeface="Aptos Mono"/>
+                <a:ea typeface="Aptos Mono"/>
+                <a:cs typeface="Aptos Mono"/>
+              </a:rPr>
+              <a:t>2</a:t>
+            </a:r>
+            <a:r>
+              <a:rPr sz="1200">
+                <a:solidFill>
+                  <a:srgbClr val="E7F1F5"/>
+                </a:solidFill>
+                <a:latin typeface="Aptos Mono"/>
+                <a:ea typeface="Aptos Mono"/>
+                <a:cs typeface="Aptos Mono"/>
+              </a:rPr>
+              <a:t>) {</a:t>
+            </a:r>
+          </a:p>
+          <a:p xmlns:a="http://schemas.openxmlformats.org/drawingml/2006/main">
+            <a:pPr>
+              <a:lnSpc>
+                <a:spcPct val="105000"/>
+              </a:lnSpc>
+              <a:spcAft>
+                <a:spcPts val="0"/>
+              </a:spcAft>
+              <a:buNone/>
+              <a:defRPr sz="1200"/>
+            </a:pPr>
+            <a:r>
+              <a:rPr sz="1200">
+                <a:solidFill>
+                  <a:srgbClr val="67869A"/>
+                </a:solidFill>
+                <a:latin typeface="Aptos Mono"/>
+                <a:ea typeface="Aptos Mono"/>
+                <a:cs typeface="Aptos Mono"/>
+              </a:rPr>
+              <a:t>10  </a:t>
+            </a:r>
+            <a:r>
+              <a:rPr sz="1200">
+                <a:solidFill>
+                  <a:srgbClr val="E7F1F5"/>
+                </a:solidFill>
+                <a:latin typeface="Aptos Mono"/>
+                <a:ea typeface="Aptos Mono"/>
+                <a:cs typeface="Aptos Mono"/>
+              </a:rPr>
+              <a:t>      </a:t>
+            </a:r>
+            <a:r>
+              <a:rPr sz="1200">
+                <a:solidFill>
+                  <a:srgbClr val="78C7FF"/>
+                </a:solidFill>
+                <a:latin typeface="Aptos Mono"/>
+                <a:ea typeface="Aptos Mono"/>
+                <a:cs typeface="Aptos Mono"/>
+              </a:rPr>
+              <a:t>await</a:t>
+            </a:r>
+            <a:r>
+              <a:rPr sz="1200">
+                <a:solidFill>
+                  <a:srgbClr val="E7F1F5"/>
+                </a:solidFill>
+                <a:latin typeface="Aptos Mono"/>
+                <a:ea typeface="Aptos Mono"/>
+                <a:cs typeface="Aptos Mono"/>
+              </a:rPr>
+              <a:t> drone</a:t>
+            </a:r>
+            <a:r>
+              <a:rPr sz="1200">
+                <a:solidFill>
+                  <a:srgbClr val="B4C9D8"/>
+                </a:solidFill>
+                <a:latin typeface="Aptos Mono"/>
+                <a:ea typeface="Aptos Mono"/>
+                <a:cs typeface="Aptos Mono"/>
+              </a:rPr>
+              <a:t>.</a:t>
+            </a:r>
+            <a:r>
+              <a:rPr sz="1200">
+                <a:solidFill>
+                  <a:srgbClr val="55D6C2"/>
+                </a:solidFill>
+                <a:latin typeface="Aptos Mono"/>
+                <a:ea typeface="Aptos Mono"/>
+                <a:cs typeface="Aptos Mono"/>
+              </a:rPr>
+              <a:t>hover</a:t>
+            </a:r>
+            <a:r>
+              <a:rPr sz="1200">
+                <a:solidFill>
+                  <a:srgbClr val="E7F1F5"/>
+                </a:solidFill>
+                <a:latin typeface="Aptos Mono"/>
+                <a:ea typeface="Aptos Mono"/>
+                <a:cs typeface="Aptos Mono"/>
+              </a:rPr>
+              <a:t>();</a:t>
+            </a:r>
+          </a:p>
+          <a:p xmlns:a="http://schemas.openxmlformats.org/drawingml/2006/main">
+            <a:pPr>
+              <a:lnSpc>
+                <a:spcPct val="105000"/>
+              </a:lnSpc>
+              <a:spcAft>
+                <a:spcPts val="0"/>
+              </a:spcAft>
+              <a:buNone/>
+              <a:defRPr sz="1200"/>
+            </a:pPr>
+            <a:r>
+              <a:rPr sz="1200">
+                <a:solidFill>
+                  <a:srgbClr val="67869A"/>
+                </a:solidFill>
+                <a:latin typeface="Aptos Mono"/>
+                <a:ea typeface="Aptos Mono"/>
+                <a:cs typeface="Aptos Mono"/>
+              </a:rPr>
+              <a:t>11  </a:t>
+            </a:r>
+            <a:r>
+              <a:rPr sz="1200">
+                <a:solidFill>
+                  <a:srgbClr val="E7F1F5"/>
+                </a:solidFill>
+                <a:latin typeface="Aptos Mono"/>
+                <a:ea typeface="Aptos Mono"/>
+                <a:cs typeface="Aptos Mono"/>
+              </a:rPr>
+              <a:t>      </a:t>
+            </a:r>
+            <a:r>
+              <a:rPr sz="1200">
+                <a:solidFill>
+                  <a:srgbClr val="78C7FF"/>
+                </a:solidFill>
+                <a:latin typeface="Aptos Mono"/>
+                <a:ea typeface="Aptos Mono"/>
+                <a:cs typeface="Aptos Mono"/>
+              </a:rPr>
+              <a:t>break</a:t>
+            </a:r>
+            <a:r>
+              <a:rPr sz="1200">
+                <a:solidFill>
+                  <a:srgbClr val="E7F1F5"/>
+                </a:solidFill>
+                <a:latin typeface="Aptos Mono"/>
+                <a:ea typeface="Aptos Mono"/>
+                <a:cs typeface="Aptos Mono"/>
+              </a:rPr>
+              <a:t>;</a:t>
+            </a:r>
+          </a:p>
+          <a:p xmlns:a="http://schemas.openxmlformats.org/drawingml/2006/main">
+            <a:pPr>
+              <a:lnSpc>
+                <a:spcPct val="105000"/>
+              </a:lnSpc>
+              <a:spcAft>
+                <a:spcPts val="0"/>
+              </a:spcAft>
+              <a:buNone/>
+              <a:defRPr sz="1200"/>
+            </a:pPr>
+            <a:r>
+              <a:rPr sz="1200">
+                <a:solidFill>
+                  <a:srgbClr val="67869A"/>
+                </a:solidFill>
+                <a:latin typeface="Aptos Mono"/>
+                <a:ea typeface="Aptos Mono"/>
+                <a:cs typeface="Aptos Mono"/>
+              </a:rPr>
+              <a:t>12  </a:t>
+            </a:r>
+            <a:r>
+              <a:rPr sz="1200">
+                <a:solidFill>
+                  <a:srgbClr val="E7F1F5"/>
+                </a:solidFill>
+                <a:latin typeface="Aptos Mono"/>
+                <a:ea typeface="Aptos Mono"/>
+                <a:cs typeface="Aptos Mono"/>
+              </a:rPr>
+              <a:t>    }</a:t>
+            </a:r>
+          </a:p>
+          <a:p xmlns:a="http://schemas.openxmlformats.org/drawingml/2006/main">
+            <a:pPr>
+              <a:lnSpc>
+                <a:spcPct val="105000"/>
+              </a:lnSpc>
+              <a:spcAft>
+                <a:spcPts val="0"/>
+              </a:spcAft>
+              <a:buNone/>
+              <a:defRPr sz="1200"/>
+            </a:pPr>
+            <a:r>
+              <a:rPr sz="1200">
+                <a:solidFill>
+                  <a:srgbClr val="67869A"/>
+                </a:solidFill>
+                <a:latin typeface="Aptos Mono"/>
+                <a:ea typeface="Aptos Mono"/>
+                <a:cs typeface="Aptos Mono"/>
+              </a:rPr>
+              <a:t>13  </a:t>
+            </a:r>
+            <a:r>
+              <a:rPr sz="1200">
+                <a:solidFill>
+                  <a:srgbClr val="E7F1F5"/>
+                </a:solidFill>
+                <a:latin typeface="Aptos Mono"/>
+                <a:ea typeface="Aptos Mono"/>
+                <a:cs typeface="Aptos Mono"/>
+              </a:rPr>
+              <a:t>    </a:t>
+            </a:r>
+            <a:r>
+              <a:rPr sz="1200">
+                <a:solidFill>
+                  <a:srgbClr val="78C7FF"/>
+                </a:solidFill>
+                <a:latin typeface="Aptos Mono"/>
+                <a:ea typeface="Aptos Mono"/>
+                <a:cs typeface="Aptos Mono"/>
+              </a:rPr>
+              <a:t>await</a:t>
+            </a:r>
+            <a:r>
+              <a:rPr sz="1200">
+                <a:solidFill>
+                  <a:srgbClr val="E7F1F5"/>
+                </a:solidFill>
+                <a:latin typeface="Aptos Mono"/>
+                <a:ea typeface="Aptos Mono"/>
+                <a:cs typeface="Aptos Mono"/>
+              </a:rPr>
+              <a:t> drone</a:t>
+            </a:r>
+            <a:r>
+              <a:rPr sz="1200">
+                <a:solidFill>
+                  <a:srgbClr val="B4C9D8"/>
+                </a:solidFill>
+                <a:latin typeface="Aptos Mono"/>
+                <a:ea typeface="Aptos Mono"/>
+                <a:cs typeface="Aptos Mono"/>
+              </a:rPr>
+              <a:t>.</a:t>
+            </a:r>
+            <a:r>
+              <a:rPr sz="1200">
+                <a:solidFill>
+                  <a:srgbClr val="55D6C2"/>
+                </a:solidFill>
+                <a:latin typeface="Aptos Mono"/>
+                <a:ea typeface="Aptos Mono"/>
+                <a:cs typeface="Aptos Mono"/>
+              </a:rPr>
+              <a:t>wait</a:t>
+            </a:r>
+            <a:r>
+              <a:rPr sz="1200">
+                <a:solidFill>
+                  <a:srgbClr val="E7F1F5"/>
+                </a:solidFill>
+                <a:latin typeface="Aptos Mono"/>
+                <a:ea typeface="Aptos Mono"/>
+                <a:cs typeface="Aptos Mono"/>
+              </a:rPr>
+              <a:t>(</a:t>
+            </a:r>
+            <a:r>
+              <a:rPr sz="1200">
+                <a:solidFill>
+                  <a:srgbClr val="F5C66B"/>
+                </a:solidFill>
+                <a:latin typeface="Aptos Mono"/>
+                <a:ea typeface="Aptos Mono"/>
+                <a:cs typeface="Aptos Mono"/>
+              </a:rPr>
+              <a:t>0.35</a:t>
+            </a:r>
+            <a:r>
+              <a:rPr sz="1200">
+                <a:solidFill>
+                  <a:srgbClr val="E7F1F5"/>
+                </a:solidFill>
+                <a:latin typeface="Aptos Mono"/>
+                <a:ea typeface="Aptos Mono"/>
+                <a:cs typeface="Aptos Mono"/>
+              </a:rPr>
+              <a:t>);</a:t>
+            </a:r>
+          </a:p>
+          <a:p xmlns:a="http://schemas.openxmlformats.org/drawingml/2006/main">
+            <a:pPr>
+              <a:lnSpc>
+                <a:spcPct val="105000"/>
+              </a:lnSpc>
+              <a:spcAft>
+                <a:spcPts val="0"/>
+              </a:spcAft>
+              <a:buNone/>
+              <a:defRPr sz="1200"/>
+            </a:pPr>
+            <a:r>
+              <a:rPr sz="1200">
+                <a:solidFill>
+                  <a:srgbClr val="67869A"/>
+                </a:solidFill>
+                <a:latin typeface="Aptos Mono"/>
+                <a:ea typeface="Aptos Mono"/>
+                <a:cs typeface="Aptos Mono"/>
+              </a:rPr>
+              <a:t>14  </a:t>
+            </a:r>
+            <a:r>
+              <a:rPr sz="1200">
+                <a:solidFill>
+                  <a:srgbClr val="E7F1F5"/>
+                </a:solidFill>
+                <a:latin typeface="Aptos Mono"/>
+                <a:ea typeface="Aptos Mono"/>
+                <a:cs typeface="Aptos Mono"/>
+              </a:rPr>
+              <a:t>  }</a:t>
+            </a:r>
+          </a:p>
+          <a:p xmlns:a="http://schemas.openxmlformats.org/drawingml/2006/main">
+            <a:pPr>
+              <a:lnSpc>
+                <a:spcPct val="105000"/>
+              </a:lnSpc>
+              <a:spcAft>
+                <a:spcPts val="0"/>
+              </a:spcAft>
+              <a:buNone/>
+              <a:defRPr sz="1200"/>
+            </a:pPr>
+            <a:r>
+              <a:rPr sz="1200">
+                <a:solidFill>
+                  <a:srgbClr val="67869A"/>
+                </a:solidFill>
+                <a:latin typeface="Aptos Mono"/>
+                <a:ea typeface="Aptos Mono"/>
+                <a:cs typeface="Aptos Mono"/>
+              </a:rPr>
+              <a:t>15  </a:t>
+            </a:r>
+            <a:r>
+              <a:rPr sz="1200">
+                <a:solidFill>
+                  <a:srgbClr val="E7F1F5"/>
+                </a:solidFill>
+                <a:latin typeface="Aptos Mono"/>
+                <a:ea typeface="Aptos Mono"/>
+                <a:cs typeface="Aptos Mono"/>
+              </a:rPr>
+              <a:t>} </a:t>
+            </a:r>
+            <a:r>
+              <a:rPr sz="1200">
+                <a:solidFill>
+                  <a:srgbClr val="78C7FF"/>
+                </a:solidFill>
+                <a:latin typeface="Aptos Mono"/>
+                <a:ea typeface="Aptos Mono"/>
+                <a:cs typeface="Aptos Mono"/>
+              </a:rPr>
+              <a:t>finally</a:t>
+            </a:r>
+            <a:r>
+              <a:rPr sz="1200">
+                <a:solidFill>
+                  <a:srgbClr val="E7F1F5"/>
+                </a:solidFill>
+                <a:latin typeface="Aptos Mono"/>
+                <a:ea typeface="Aptos Mono"/>
+                <a:cs typeface="Aptos Mono"/>
+              </a:rPr>
+              <a:t> {</a:t>
+            </a:r>
+          </a:p>
+          <a:p xmlns:a="http://schemas.openxmlformats.org/drawingml/2006/main">
+            <a:pPr>
+              <a:lnSpc>
+                <a:spcPct val="105000"/>
+              </a:lnSpc>
+              <a:spcAft>
+                <a:spcPts val="0"/>
+              </a:spcAft>
+              <a:buNone/>
+              <a:defRPr sz="1200"/>
+            </a:pPr>
+            <a:r>
+              <a:rPr sz="1200">
+                <a:solidFill>
+                  <a:srgbClr val="67869A"/>
+                </a:solidFill>
+                <a:latin typeface="Aptos Mono"/>
+                <a:ea typeface="Aptos Mono"/>
+                <a:cs typeface="Aptos Mono"/>
+              </a:rPr>
+              <a:t>16  </a:t>
+            </a:r>
+            <a:r>
+              <a:rPr sz="1200">
+                <a:solidFill>
+                  <a:srgbClr val="E7F1F5"/>
+                </a:solidFill>
+                <a:latin typeface="Aptos Mono"/>
+                <a:ea typeface="Aptos Mono"/>
+                <a:cs typeface="Aptos Mono"/>
+              </a:rPr>
+              <a:t>  </a:t>
+            </a:r>
+            <a:r>
+              <a:rPr sz="1200">
+                <a:solidFill>
+                  <a:srgbClr val="78C7FF"/>
+                </a:solidFill>
+                <a:latin typeface="Aptos Mono"/>
+                <a:ea typeface="Aptos Mono"/>
+                <a:cs typeface="Aptos Mono"/>
+              </a:rPr>
+              <a:t>await</a:t>
+            </a:r>
+            <a:r>
+              <a:rPr sz="1200">
+                <a:solidFill>
+                  <a:srgbClr val="E7F1F5"/>
+                </a:solidFill>
+                <a:latin typeface="Aptos Mono"/>
+                <a:ea typeface="Aptos Mono"/>
+                <a:cs typeface="Aptos Mono"/>
+              </a:rPr>
+              <a:t> drone</a:t>
+            </a:r>
+            <a:r>
+              <a:rPr sz="1200">
+                <a:solidFill>
+                  <a:srgbClr val="B4C9D8"/>
+                </a:solidFill>
+                <a:latin typeface="Aptos Mono"/>
+                <a:ea typeface="Aptos Mono"/>
+                <a:cs typeface="Aptos Mono"/>
+              </a:rPr>
+              <a:t>.</a:t>
+            </a:r>
+            <a:r>
+              <a:rPr sz="1200">
+                <a:solidFill>
+                  <a:srgbClr val="55D6C2"/>
+                </a:solidFill>
+                <a:latin typeface="Aptos Mono"/>
+                <a:ea typeface="Aptos Mono"/>
+                <a:cs typeface="Aptos Mono"/>
+              </a:rPr>
+              <a:t>land</a:t>
+            </a:r>
+            <a:r>
+              <a:rPr sz="1200">
+                <a:solidFill>
+                  <a:srgbClr val="E7F1F5"/>
+                </a:solidFill>
+                <a:latin typeface="Aptos Mono"/>
+                <a:ea typeface="Aptos Mono"/>
+                <a:cs typeface="Aptos Mono"/>
+              </a:rPr>
+              <a:t>();</a:t>
+            </a:r>
+          </a:p>
+          <a:p xmlns:a="http://schemas.openxmlformats.org/drawingml/2006/main">
+            <a:pPr>
+              <a:lnSpc>
+                <a:spcPct val="105000"/>
+              </a:lnSpc>
+              <a:spcAft>
+                <a:spcPts val="0"/>
+              </a:spcAft>
+              <a:buNone/>
+              <a:defRPr sz="1200"/>
+            </a:pPr>
+            <a:r>
+              <a:rPr sz="1200">
+                <a:solidFill>
+                  <a:srgbClr val="67869A"/>
+                </a:solidFill>
+                <a:latin typeface="Aptos Mono"/>
+                <a:ea typeface="Aptos Mono"/>
+                <a:cs typeface="Aptos Mono"/>
+              </a:rPr>
+              <a:t>17  </a:t>
+            </a:r>
+            <a:r>
+              <a:rPr sz="1200">
+                <a:solidFill>
+                  <a:srgbClr val="E7F1F5"/>
+                </a:solidFill>
+                <a:latin typeface="Aptos Mono"/>
+                <a:ea typeface="Aptos Mono"/>
+                <a:cs typeface="Aptos Mono"/>
+              </a:rPr>
+              <a:t>}</a:t>
+            </a:r>
+          </a:p>
+        </p:txBody>
+      </p:sp>
+      <p:sp>
+        <p:nvSpPr>
+          <p:cNvPr id="17" name="">
+            <a:extLst xmlns:a="http://schemas.openxmlformats.org/drawingml/2006/main">
+              <a:ext uri="{FF2B5EF4-FFF2-40B4-BE49-F238E27FC236}">
+                <a16:creationId xmlns:a16="http://schemas.microsoft.com/office/drawing/2014/main" id="{EF9A4A55-973D-408B-8A13-8077A6326180}"/>
+              </a:ext>
+            </a:extLst>
+          </p:cNvPr>
+          <p:cNvSpPr>
+            <a:spLocks xmlns:a="http://schemas.openxmlformats.org/drawingml/2006/main" noGrp="1"/>
+          </p:cNvSpPr>
+          <p:nvPr/>
+        </p:nvSpPr>
+        <p:spPr>
+          <a:xfrm xmlns:a="http://schemas.openxmlformats.org/drawingml/2006/main">
+            <a:off x="7696200" y="1409700"/>
+            <a:ext cx="3886200" cy="3028950"/>
+          </a:xfrm>
+          <a:prstGeom xmlns:a="http://schemas.openxmlformats.org/drawingml/2006/main" prst="roundRect">
+            <a:avLst>
+              <a:gd name="adj" fmla="val 3774"/>
+            </a:avLst>
+          </a:prstGeom>
+          <a:solidFill xmlns:a="http://schemas.openxmlformats.org/drawingml/2006/main">
+            <a:srgbClr val="FFFFFF"/>
+          </a:solidFill>
+          <a:ln xmlns:a="http://schemas.openxmlformats.org/drawingml/2006/main" w="14288">
+            <a:solidFill>
+              <a:srgbClr val="C3D2D9"/>
+            </a:solidFill>
+            <a:prstDash val="solid"/>
+          </a:ln>
+        </p:spPr>
+      </p:sp>
+      <p:sp>
+        <p:nvSpPr>
+          <p:cNvPr id="18" name="">
+            <a:extLst xmlns:a="http://schemas.openxmlformats.org/drawingml/2006/main">
+              <a:ext uri="{FF2B5EF4-FFF2-40B4-BE49-F238E27FC236}">
+                <a16:creationId xmlns:a16="http://schemas.microsoft.com/office/drawing/2014/main" id="{0AA9F046-8EBC-430C-A56C-4944515BB9B5}"/>
+              </a:ext>
+            </a:extLst>
+          </p:cNvPr>
+          <p:cNvSpPr>
+            <a:spLocks xmlns:a="http://schemas.openxmlformats.org/drawingml/2006/main" noGrp="1"/>
+          </p:cNvSpPr>
+          <p:nvPr/>
+        </p:nvSpPr>
+        <p:spPr>
+          <a:xfrm xmlns:a="http://schemas.openxmlformats.org/drawingml/2006/main">
+            <a:off x="7696200" y="1409700"/>
+            <a:ext cx="66675" cy="3028950"/>
+          </a:xfrm>
+          <a:prstGeom xmlns:a="http://schemas.openxmlformats.org/drawingml/2006/main" prst="rect">
+            <a:avLst/>
+          </a:prstGeom>
+          <a:solidFill xmlns:a="http://schemas.openxmlformats.org/drawingml/2006/main">
+            <a:srgbClr val="008C95"/>
+          </a:solidFill>
+          <a:ln xmlns:a="http://schemas.openxmlformats.org/drawingml/2006/main" w="0">
+            <a:solidFill>
+              <a:srgbClr val="008C95"/>
+            </a:solidFill>
+            <a:prstDash val="solid"/>
+          </a:ln>
+        </p:spPr>
+      </p:sp>
+      <p:sp>
+        <p:nvSpPr>
+          <p:cNvPr id="19" name="">
+            <a:extLst xmlns:a="http://schemas.openxmlformats.org/drawingml/2006/main">
+              <a:ext uri="{FF2B5EF4-FFF2-40B4-BE49-F238E27FC236}">
+                <a16:creationId xmlns:a16="http://schemas.microsoft.com/office/drawing/2014/main" id="{EBF51050-3848-485F-B30B-24AC437E56EF}"/>
+              </a:ext>
+            </a:extLst>
+          </p:cNvPr>
+          <p:cNvSpPr>
+            <a:spLocks xmlns:a="http://schemas.openxmlformats.org/drawingml/2006/main" noGrp="1"/>
+          </p:cNvSpPr>
+          <p:nvPr/>
+        </p:nvSpPr>
+        <p:spPr>
+          <a:xfrm xmlns:a="http://schemas.openxmlformats.org/drawingml/2006/main">
+            <a:off x="7905750" y="1543050"/>
+            <a:ext cx="3467100" cy="190500"/>
+          </a:xfrm>
+          <a:prstGeom xmlns:a="http://schemas.openxmlformats.org/drawingml/2006/main" prst="rect">
+            <a:avLst/>
+          </a:prstGeom>
+          <a:noFill xmlns:a="http://schemas.openxmlformats.org/drawingml/2006/main"/>
+          <a:ln xmlns:a="http://schemas.openxmlformats.org/drawingml/2006/main" w="0">
+            <a:noFill/>
+            <a:prstDash val="solid"/>
+          </a:ln>
+        </p:spPr>
+        <p:txBody>
+          <a:bodyPr xmlns:a="http://schemas.openxmlformats.org/drawingml/2006/main"/>
+          <a:lstStyle xmlns:a="http://schemas.openxmlformats.org/drawingml/2006/main"/>
+          <a:p xmlns:a="http://schemas.openxmlformats.org/drawingml/2006/main">
+            <a:pPr>
+              <a:defRPr sz="975" b="1">
+                <a:solidFill>
+                  <a:srgbClr val="008C95"/>
+                </a:solidFill>
+              </a:defRPr>
+            </a:pPr>
+            <a:r>
+              <a:rPr sz="975" b="1">
+                <a:solidFill>
+                  <a:srgbClr val="008C95"/>
+                </a:solidFill>
+              </a:rPr>
+              <a:t>VISION METHOD</a:t>
+            </a:r>
+          </a:p>
+        </p:txBody>
+      </p:sp>
+      <p:sp>
+        <p:nvSpPr>
+          <p:cNvPr id="20" name="">
+            <a:extLst xmlns:a="http://schemas.openxmlformats.org/drawingml/2006/main">
+              <a:ext uri="{FF2B5EF4-FFF2-40B4-BE49-F238E27FC236}">
+                <a16:creationId xmlns:a16="http://schemas.microsoft.com/office/drawing/2014/main" id="{3BF4F691-7840-425E-BFD4-1FD2A1C3A930}"/>
+              </a:ext>
+            </a:extLst>
+          </p:cNvPr>
+          <p:cNvSpPr>
+            <a:spLocks xmlns:a="http://schemas.openxmlformats.org/drawingml/2006/main" noGrp="1"/>
+          </p:cNvSpPr>
+          <p:nvPr/>
+        </p:nvSpPr>
+        <p:spPr>
+          <a:xfrm xmlns:a="http://schemas.openxmlformats.org/drawingml/2006/main">
+            <a:off x="7905750" y="1809750"/>
+            <a:ext cx="3467100" cy="323850"/>
+          </a:xfrm>
+          <a:prstGeom xmlns:a="http://schemas.openxmlformats.org/drawingml/2006/main" prst="rect">
+            <a:avLst/>
+          </a:prstGeom>
+          <a:solidFill xmlns:a="http://schemas.openxmlformats.org/drawingml/2006/main">
+            <a:srgbClr val="001B3A"/>
+          </a:solidFill>
+          <a:ln xmlns:a="http://schemas.openxmlformats.org/drawingml/2006/main" w="0">
+            <a:solidFill>
+              <a:srgbClr val="001B3A"/>
+            </a:solidFill>
+            <a:prstDash val="solid"/>
+          </a:ln>
+        </p:spPr>
+        <p:txBody>
+          <a:bodyPr xmlns:a="http://schemas.openxmlformats.org/drawingml/2006/main" lIns="76200" tIns="57150" rIns="76200" bIns="38100">
+            <a:noAutofit/>
+          </a:bodyPr>
+          <a:lstStyle xmlns:a="http://schemas.openxmlformats.org/drawingml/2006/main"/>
+          <a:p xmlns:a="http://schemas.openxmlformats.org/drawingml/2006/main">
+            <a:pPr>
+              <a:spcAft>
+                <a:spcPts val="0"/>
+              </a:spcAft>
+              <a:defRPr sz="900"/>
+            </a:pPr>
+            <a:r>
+              <a:rPr sz="900">
+                <a:solidFill>
+                  <a:srgbClr val="78C7FF"/>
+                </a:solidFill>
+                <a:latin typeface="Aptos Mono"/>
+                <a:ea typeface="Aptos Mono"/>
+                <a:cs typeface="Aptos Mono"/>
+              </a:rPr>
+              <a:t>await</a:t>
+            </a:r>
+            <a:r>
+              <a:rPr sz="900">
+                <a:solidFill>
+                  <a:srgbClr val="E7F1F5"/>
+                </a:solidFill>
+                <a:latin typeface="Aptos Mono"/>
+                <a:ea typeface="Aptos Mono"/>
+                <a:cs typeface="Aptos Mono"/>
+              </a:rPr>
+              <a:t> vision</a:t>
+            </a:r>
+            <a:r>
+              <a:rPr sz="900">
+                <a:solidFill>
+                  <a:srgbClr val="B4C9D8"/>
+                </a:solidFill>
+                <a:latin typeface="Aptos Mono"/>
+                <a:ea typeface="Aptos Mono"/>
+                <a:cs typeface="Aptos Mono"/>
+              </a:rPr>
+              <a:t>.</a:t>
+            </a:r>
+            <a:r>
+              <a:rPr sz="900">
+                <a:solidFill>
+                  <a:srgbClr val="55D6C2"/>
+                </a:solidFill>
+                <a:latin typeface="Aptos Mono"/>
+                <a:ea typeface="Aptos Mono"/>
+                <a:cs typeface="Aptos Mono"/>
+              </a:rPr>
+              <a:t>seesBinary</a:t>
+            </a:r>
+            <a:r>
+              <a:rPr sz="900">
+                <a:solidFill>
+                  <a:srgbClr val="E7F1F5"/>
+                </a:solidFill>
+                <a:latin typeface="Aptos Mono"/>
+                <a:ea typeface="Aptos Mono"/>
+                <a:cs typeface="Aptos Mono"/>
+              </a:rPr>
+              <a:t>(color, threshold, invert, minimumCoverage)</a:t>
+            </a:r>
+          </a:p>
+        </p:txBody>
+      </p:sp>
+      <p:sp>
+        <p:nvSpPr>
+          <p:cNvPr id="21" name="">
+            <a:extLst xmlns:a="http://schemas.openxmlformats.org/drawingml/2006/main">
+              <a:ext uri="{FF2B5EF4-FFF2-40B4-BE49-F238E27FC236}">
+                <a16:creationId xmlns:a16="http://schemas.microsoft.com/office/drawing/2014/main" id="{C3174B1B-C6DE-41C0-A845-27A91957D0EB}"/>
+              </a:ext>
+            </a:extLst>
+          </p:cNvPr>
+          <p:cNvSpPr>
+            <a:spLocks xmlns:a="http://schemas.openxmlformats.org/drawingml/2006/main" noGrp="1"/>
+          </p:cNvSpPr>
+          <p:nvPr/>
+        </p:nvSpPr>
+        <p:spPr>
+          <a:xfrm xmlns:a="http://schemas.openxmlformats.org/drawingml/2006/main">
+            <a:off x="7924800" y="2266950"/>
+            <a:ext cx="3429000" cy="2038350"/>
+          </a:xfrm>
+          <a:prstGeom xmlns:a="http://schemas.openxmlformats.org/drawingml/2006/main" prst="rect">
+            <a:avLst/>
+          </a:prstGeom>
+          <a:noFill xmlns:a="http://schemas.openxmlformats.org/drawingml/2006/main"/>
+          <a:ln xmlns:a="http://schemas.openxmlformats.org/drawingml/2006/main" w="0">
+            <a:noFill/>
+            <a:prstDash val="solid"/>
+          </a:ln>
+        </p:spPr>
+        <p:txBody>
+          <a:bodyPr xmlns:a="http://schemas.openxmlformats.org/drawingml/2006/main"/>
+          <a:lstStyle xmlns:a="http://schemas.openxmlformats.org/drawingml/2006/main"/>
+          <a:p xmlns:a="http://schemas.openxmlformats.org/drawingml/2006/main">
+            <a:pPr>
+              <a:defRPr sz="1125">
+                <a:solidFill>
+                  <a:srgbClr val="0D2843"/>
+                </a:solidFill>
+              </a:defRPr>
+            </a:pPr>
+            <a:r>
+              <a:rPr sz="1125">
+                <a:solidFill>
+                  <a:srgbClr val="0D2843"/>
+                </a:solidFill>
+              </a:rPr>
+              <a:t>color — "white" | "black"</a:t>
+            </a:r>
+          </a:p>
+          <a:p xmlns:a="http://schemas.openxmlformats.org/drawingml/2006/main">
+            <a:pPr>
+              <a:defRPr sz="1125">
+                <a:solidFill>
+                  <a:srgbClr val="0D2843"/>
+                </a:solidFill>
+              </a:defRPr>
+            </a:pPr>
+            <a:r>
+              <a:rPr sz="1125">
+                <a:solidFill>
+                  <a:srgbClr val="0D2843"/>
+                </a:solidFill>
+              </a:rPr>
+              <a:t>threshold — 0…100 brightness%; default 60</a:t>
+            </a:r>
+          </a:p>
+          <a:p xmlns:a="http://schemas.openxmlformats.org/drawingml/2006/main">
+            <a:pPr>
+              <a:defRPr sz="1125">
+                <a:solidFill>
+                  <a:srgbClr val="0D2843"/>
+                </a:solidFill>
+              </a:defRPr>
+            </a:pPr>
+            <a:r>
+              <a:rPr sz="1125">
+                <a:solidFill>
+                  <a:srgbClr val="0D2843"/>
+                </a:solidFill>
+              </a:rPr>
+              <a:t>invert — boolean; default false</a:t>
+            </a:r>
+          </a:p>
+          <a:p xmlns:a="http://schemas.openxmlformats.org/drawingml/2006/main">
+            <a:pPr>
+              <a:defRPr sz="1125">
+                <a:solidFill>
+                  <a:srgbClr val="0D2843"/>
+                </a:solidFill>
+              </a:defRPr>
+            </a:pPr>
+            <a:r>
+              <a:rPr sz="1125">
+                <a:solidFill>
+                  <a:srgbClr val="0D2843"/>
+                </a:solidFill>
+              </a:rPr>
+              <a:t>minimumCoverage — 0…100 frame%; default 10</a:t>
+            </a:r>
+          </a:p>
+          <a:p xmlns:a="http://schemas.openxmlformats.org/drawingml/2006/main">
+            <a:pPr>
+              <a:defRPr sz="1125">
+                <a:solidFill>
+                  <a:srgbClr val="0D2843"/>
+                </a:solidFill>
+              </a:defRPr>
+            </a:pPr>
+            <a:r>
+              <a:rPr sz="1125">
+                <a:solidFill>
+                  <a:srgbClr val="0D2843"/>
+                </a:solidFill>
+              </a:rPr>
+              <a:t>returns — Promise&lt;boolean&gt; after a fresh scan</a:t>
+            </a:r>
+          </a:p>
+          <a:p xmlns:a="http://schemas.openxmlformats.org/drawingml/2006/main">
+            <a:pPr>
+              <a:defRPr sz="1125">
+                <a:solidFill>
+                  <a:srgbClr val="0D2843"/>
+                </a:solidFill>
+              </a:defRPr>
+            </a:pPr>
+            <a:r>
+              <a:rPr sz="1125">
+                <a:solidFill>
+                  <a:srgbClr val="0D2843"/>
+                </a:solidFill>
+              </a:rPr>
+              <a:t>throws — if camera pixels cannot be captured</a:t>
+            </a:r>
+          </a:p>
+        </p:txBody>
+      </p:sp>
+      <p:sp>
+        <p:nvSpPr>
+          <p:cNvPr id="22" name="">
+            <a:extLst xmlns:a="http://schemas.openxmlformats.org/drawingml/2006/main">
+              <a:ext uri="{FF2B5EF4-FFF2-40B4-BE49-F238E27FC236}">
+                <a16:creationId xmlns:a16="http://schemas.microsoft.com/office/drawing/2014/main" id="{943014EA-DEF1-49E3-8DC7-0AD8DEF259B7}"/>
+              </a:ext>
+            </a:extLst>
+          </p:cNvPr>
+          <p:cNvSpPr>
+            <a:spLocks xmlns:a="http://schemas.openxmlformats.org/drawingml/2006/main" noGrp="1"/>
+          </p:cNvSpPr>
+          <p:nvPr/>
+        </p:nvSpPr>
+        <p:spPr>
+          <a:xfrm xmlns:a="http://schemas.openxmlformats.org/drawingml/2006/main">
+            <a:off x="7696200" y="4667250"/>
+            <a:ext cx="3886200" cy="1581150"/>
+          </a:xfrm>
+          <a:prstGeom xmlns:a="http://schemas.openxmlformats.org/drawingml/2006/main" prst="roundRect">
+            <a:avLst>
+              <a:gd name="adj" fmla="val 7229"/>
+            </a:avLst>
+          </a:prstGeom>
+          <a:solidFill xmlns:a="http://schemas.openxmlformats.org/drawingml/2006/main">
+            <a:srgbClr val="FBE4E7"/>
+          </a:solidFill>
+          <a:ln xmlns:a="http://schemas.openxmlformats.org/drawingml/2006/main" w="14288">
+            <a:solidFill>
+              <a:srgbClr val="D94F5C"/>
+            </a:solidFill>
+            <a:prstDash val="solid"/>
+          </a:ln>
+        </p:spPr>
+      </p:sp>
+      <p:sp>
+        <p:nvSpPr>
+          <p:cNvPr id="23" name="">
+            <a:extLst xmlns:a="http://schemas.openxmlformats.org/drawingml/2006/main">
+              <a:ext uri="{FF2B5EF4-FFF2-40B4-BE49-F238E27FC236}">
+                <a16:creationId xmlns:a16="http://schemas.microsoft.com/office/drawing/2014/main" id="{E8F851F7-4A27-4469-A8C6-0CEF4A5574FA}"/>
+              </a:ext>
+            </a:extLst>
+          </p:cNvPr>
+          <p:cNvSpPr>
+            <a:spLocks xmlns:a="http://schemas.openxmlformats.org/drawingml/2006/main" noGrp="1"/>
+          </p:cNvSpPr>
+          <p:nvPr/>
+        </p:nvSpPr>
+        <p:spPr>
+          <a:xfrm xmlns:a="http://schemas.openxmlformats.org/drawingml/2006/main">
+            <a:off x="7943850" y="4876800"/>
+            <a:ext cx="3390900" cy="228600"/>
+          </a:xfrm>
+          <a:prstGeom xmlns:a="http://schemas.openxmlformats.org/drawingml/2006/main" prst="rect">
+            <a:avLst/>
+          </a:prstGeom>
+          <a:noFill xmlns:a="http://schemas.openxmlformats.org/drawingml/2006/main"/>
+          <a:ln xmlns:a="http://schemas.openxmlformats.org/drawingml/2006/main" w="0">
+            <a:noFill/>
+            <a:prstDash val="solid"/>
+          </a:ln>
+        </p:spPr>
+        <p:txBody>
+          <a:bodyPr xmlns:a="http://schemas.openxmlformats.org/drawingml/2006/main"/>
+          <a:lstStyle xmlns:a="http://schemas.openxmlformats.org/drawingml/2006/main"/>
+          <a:p xmlns:a="http://schemas.openxmlformats.org/drawingml/2006/main">
+            <a:pPr>
+              <a:defRPr sz="1275" b="1">
+                <a:solidFill>
+                  <a:srgbClr val="D94F5C"/>
+                </a:solidFill>
+              </a:defRPr>
+            </a:pPr>
+            <a:r>
+              <a:rPr sz="1275" b="1">
+                <a:solidFill>
+                  <a:srgbClr val="D94F5C"/>
+                </a:solidFill>
+              </a:rPr>
+              <a:t>WHY THIS PATTERN IS SAFER</a:t>
+            </a:r>
+          </a:p>
+        </p:txBody>
+      </p:sp>
+      <p:sp>
+        <p:nvSpPr>
+          <p:cNvPr id="24" name="">
+            <a:extLst xmlns:a="http://schemas.openxmlformats.org/drawingml/2006/main">
+              <a:ext uri="{FF2B5EF4-FFF2-40B4-BE49-F238E27FC236}">
+                <a16:creationId xmlns:a16="http://schemas.microsoft.com/office/drawing/2014/main" id="{E91F23FC-2B97-4085-A5EE-2539D63838B0}"/>
+              </a:ext>
+            </a:extLst>
+          </p:cNvPr>
+          <p:cNvSpPr>
+            <a:spLocks xmlns:a="http://schemas.openxmlformats.org/drawingml/2006/main" noGrp="1"/>
+          </p:cNvSpPr>
+          <p:nvPr/>
+        </p:nvSpPr>
+        <p:spPr>
+          <a:xfrm xmlns:a="http://schemas.openxmlformats.org/drawingml/2006/main">
+            <a:off x="7943850" y="5219700"/>
+            <a:ext cx="3333750" cy="857250"/>
+          </a:xfrm>
+          <a:prstGeom xmlns:a="http://schemas.openxmlformats.org/drawingml/2006/main" prst="rect">
+            <a:avLst/>
+          </a:prstGeom>
+          <a:noFill xmlns:a="http://schemas.openxmlformats.org/drawingml/2006/main"/>
+          <a:ln xmlns:a="http://schemas.openxmlformats.org/drawingml/2006/main" w="0">
+            <a:noFill/>
+            <a:prstDash val="solid"/>
+          </a:ln>
+        </p:spPr>
+        <p:txBody>
+          <a:bodyPr xmlns:a="http://schemas.openxmlformats.org/drawingml/2006/main"/>
+          <a:lstStyle xmlns:a="http://schemas.openxmlformats.org/drawingml/2006/main"/>
+          <a:p xmlns:a="http://schemas.openxmlformats.org/drawingml/2006/main">
+            <a:pPr>
+              <a:defRPr sz="1050">
+                <a:solidFill>
+                  <a:srgbClr val="0D2843"/>
+                </a:solidFill>
+              </a:defRPr>
+            </a:pPr>
+            <a:r>
+              <a:rPr sz="1050">
+                <a:solidFill>
+                  <a:srgbClr val="0D2843"/>
+                </a:solidFill>
+              </a:rPr>
+              <a:t>• Two hits reduce single-frame triggers.</a:t>
+            </a:r>
+          </a:p>
+          <a:p xmlns:a="http://schemas.openxmlformats.org/drawingml/2006/main">
+            <a:pPr>
+              <a:defRPr sz="1050">
+                <a:solidFill>
+                  <a:srgbClr val="0D2843"/>
+                </a:solidFill>
+              </a:defRPr>
+            </a:pPr>
+            <a:r>
+              <a:rPr sz="1050">
+                <a:solidFill>
+                  <a:srgbClr val="0D2843"/>
+                </a:solidFill>
+              </a:rPr>
+              <a:t>• Eight attempts bound the search.</a:t>
+            </a:r>
+          </a:p>
+          <a:p xmlns:a="http://schemas.openxmlformats.org/drawingml/2006/main">
+            <a:pPr>
+              <a:defRPr sz="1050">
+                <a:solidFill>
+                  <a:srgbClr val="0D2843"/>
+                </a:solidFill>
+              </a:defRPr>
+            </a:pPr>
+            <a:r>
+              <a:rPr sz="1050">
+                <a:solidFill>
+                  <a:srgbClr val="0D2843"/>
+                </a:solidFill>
+              </a:rPr>
+              <a:t>• finally lands on success, timeout, or error.</a:t>
+            </a:r>
+          </a:p>
+          <a:p xmlns:a="http://schemas.openxmlformats.org/drawingml/2006/main">
+            <a:pPr>
+              <a:defRPr sz="1050">
+                <a:solidFill>
+                  <a:srgbClr val="0D2843"/>
+                </a:solidFill>
+              </a:defRPr>
+            </a:pPr>
+            <a:r>
+              <a:rPr sz="1050">
+                <a:solidFill>
+                  <a:srgbClr val="0D2843"/>
+                </a:solidFill>
+              </a:rPr>
+              <a:t>• break stops the loop after success.</a:t>
             </a:r>
           </a:p>
         </p:txBody>
@@ -3678,7 +6586,7 @@
     </p:spTree>
     <p:extLst>
       <p:ext uri="{BB962C8B-B14F-4D97-AF65-F5344CB8AC3E}">
-        <p14:creationId xmlns:p14="http://schemas.microsoft.com/office/powerpoint/2010/main" val="1806812514"/>
+        <p14:creationId xmlns:p14="http://schemas.microsoft.com/office/powerpoint/2010/main" val="1540860325"/>
       </p:ext>
     </p:extLst>
   </p:cSld>
@@ -3706,7 +6614,7 @@
           <p:nvPr/>
         </p:nvPicPr>
         <p:blipFill>
-          <a:blip xmlns:r="http://schemas.openxmlformats.org/officeDocument/2006/relationships" xmlns:a="http://schemas.openxmlformats.org/drawingml/2006/main" r:embed="R6e9c6c0d3a424ca0"/>
+          <a:blip xmlns:r="http://schemas.openxmlformats.org/officeDocument/2006/relationships" xmlns:a="http://schemas.openxmlformats.org/drawingml/2006/main" r:embed="Ra4d2335fad964a08"/>
           <a:srcRect xmlns:a="http://schemas.openxmlformats.org/drawingml/2006/main" l="0" t="0" r="0" b="0"/>
           <a:stretch xmlns:a="http://schemas.openxmlformats.org/drawingml/2006/main">
             <a:fillRect l="0" t="0" r="0" b="0"/>
@@ -3727,7 +6635,7 @@
           <p:cNvPr id="2" name="">
             <a:extLst xmlns:a="http://schemas.openxmlformats.org/drawingml/2006/main">
               <a:ext uri="{FF2B5EF4-FFF2-40B4-BE49-F238E27FC236}">
-                <a16:creationId xmlns:a16="http://schemas.microsoft.com/office/drawing/2014/main" id="{7BA291CD-7240-4464-BAEF-CAE8BC9B2E45}"/>
+                <a16:creationId xmlns:a16="http://schemas.microsoft.com/office/drawing/2014/main" id="{60360705-24C8-4C64-BA80-7AADD2B342AE}"/>
               </a:ext>
             </a:extLst>
           </p:cNvPr>
@@ -3760,7 +6668,7 @@
           <p:cNvPr id="3" name="">
             <a:extLst xmlns:a="http://schemas.openxmlformats.org/drawingml/2006/main">
               <a:ext uri="{FF2B5EF4-FFF2-40B4-BE49-F238E27FC236}">
-                <a16:creationId xmlns:a16="http://schemas.microsoft.com/office/drawing/2014/main" id="{C8DC393C-5A63-412B-9390-1B7FD50B17EE}"/>
+                <a16:creationId xmlns:a16="http://schemas.microsoft.com/office/drawing/2014/main" id="{472BCD26-6428-407E-AD1B-F993CEDAF416}"/>
               </a:ext>
             </a:extLst>
           </p:cNvPr>
@@ -3810,7 +6718,7 @@
           <p:cNvPr id="4" name="">
             <a:extLst xmlns:a="http://schemas.openxmlformats.org/drawingml/2006/main">
               <a:ext uri="{FF2B5EF4-FFF2-40B4-BE49-F238E27FC236}">
-                <a16:creationId xmlns:a16="http://schemas.microsoft.com/office/drawing/2014/main" id="{825B228F-7A59-498E-8ABA-4A6FE0B3C936}"/>
+                <a16:creationId xmlns:a16="http://schemas.microsoft.com/office/drawing/2014/main" id="{6CAD2769-F53E-4850-BE3C-1F27A642AA72}"/>
               </a:ext>
             </a:extLst>
           </p:cNvPr>
@@ -3860,7 +6768,7 @@
           <p:cNvPr id="5" name="">
             <a:extLst xmlns:a="http://schemas.openxmlformats.org/drawingml/2006/main">
               <a:ext uri="{FF2B5EF4-FFF2-40B4-BE49-F238E27FC236}">
-                <a16:creationId xmlns:a16="http://schemas.microsoft.com/office/drawing/2014/main" id="{F134C4BC-CE23-4148-8A5F-2DBF14931911}"/>
+                <a16:creationId xmlns:a16="http://schemas.microsoft.com/office/drawing/2014/main" id="{C4FE4E10-02E6-40C7-A54E-0BBA704380DC}"/>
               </a:ext>
             </a:extLst>
           </p:cNvPr>
@@ -3893,7 +6801,7 @@
           <p:cNvPr id="6" name="">
             <a:extLst xmlns:a="http://schemas.openxmlformats.org/drawingml/2006/main">
               <a:ext uri="{FF2B5EF4-FFF2-40B4-BE49-F238E27FC236}">
-                <a16:creationId xmlns:a16="http://schemas.microsoft.com/office/drawing/2014/main" id="{BF309587-B204-42E1-ADF1-E25AC3C53DEF}"/>
+                <a16:creationId xmlns:a16="http://schemas.microsoft.com/office/drawing/2014/main" id="{321F8812-461C-491C-92E2-3DA2D86D463A}"/>
               </a:ext>
             </a:extLst>
           </p:cNvPr>
@@ -3943,7 +6851,7 @@
           <p:cNvPr id="7" name="">
             <a:extLst xmlns:a="http://schemas.openxmlformats.org/drawingml/2006/main">
               <a:ext uri="{FF2B5EF4-FFF2-40B4-BE49-F238E27FC236}">
-                <a16:creationId xmlns:a16="http://schemas.microsoft.com/office/drawing/2014/main" id="{4C2575D2-5FE8-470B-B3E4-8DBFFA706CEB}"/>
+                <a16:creationId xmlns:a16="http://schemas.microsoft.com/office/drawing/2014/main" id="{8A1EB4DE-BC13-4E85-A125-53110AD75899}"/>
               </a:ext>
             </a:extLst>
           </p:cNvPr>
@@ -3976,7 +6884,7 @@
           <p:cNvPr id="8" name="">
             <a:extLst xmlns:a="http://schemas.openxmlformats.org/drawingml/2006/main">
               <a:ext uri="{FF2B5EF4-FFF2-40B4-BE49-F238E27FC236}">
-                <a16:creationId xmlns:a16="http://schemas.microsoft.com/office/drawing/2014/main" id="{A2CA85C9-082E-451D-8DFA-72324D6E4765}"/>
+                <a16:creationId xmlns:a16="http://schemas.microsoft.com/office/drawing/2014/main" id="{4EB58562-DE1D-4CFB-90A5-F6C9D02F19CE}"/>
               </a:ext>
             </a:extLst>
           </p:cNvPr>
@@ -4026,7 +6934,7 @@
           <p:cNvPr id="9" name="">
             <a:extLst xmlns:a="http://schemas.openxmlformats.org/drawingml/2006/main">
               <a:ext uri="{FF2B5EF4-FFF2-40B4-BE49-F238E27FC236}">
-                <a16:creationId xmlns:a16="http://schemas.microsoft.com/office/drawing/2014/main" id="{BA5A56E8-835E-4C11-BE00-797E4984E8E1}"/>
+                <a16:creationId xmlns:a16="http://schemas.microsoft.com/office/drawing/2014/main" id="{56D98C66-BE7A-4678-97F8-29603B41903C}"/>
               </a:ext>
             </a:extLst>
           </p:cNvPr>
@@ -4059,7 +6967,7 @@
           <p:cNvPr id="10" name="">
             <a:extLst xmlns:a="http://schemas.openxmlformats.org/drawingml/2006/main">
               <a:ext uri="{FF2B5EF4-FFF2-40B4-BE49-F238E27FC236}">
-                <a16:creationId xmlns:a16="http://schemas.microsoft.com/office/drawing/2014/main" id="{D7101521-11CC-4C57-9464-EEBB6776B1B4}"/>
+                <a16:creationId xmlns:a16="http://schemas.microsoft.com/office/drawing/2014/main" id="{7D708691-8C09-49FF-B3A4-6E47E53C4FF0}"/>
               </a:ext>
             </a:extLst>
           </p:cNvPr>
@@ -4107,7 +7015,7 @@
     </p:spTree>
     <p:extLst>
       <p:ext uri="{BB962C8B-B14F-4D97-AF65-F5344CB8AC3E}">
-        <p14:creationId xmlns:p14="http://schemas.microsoft.com/office/powerpoint/2010/main" val="1625859491"/>
+        <p14:creationId xmlns:p14="http://schemas.microsoft.com/office/powerpoint/2010/main" val="1121883770"/>
       </p:ext>
     </p:extLst>
   </p:cSld>
